--- a/s1/S1 CS Slides.pptx
+++ b/s1/S1 CS Slides.pptx
@@ -5,20 +5,21 @@
     <p:sldMasterId id="2147483648" r:id="rId1"/>
   </p:sldMasterIdLst>
   <p:notesMasterIdLst>
-    <p:notesMasterId r:id="rId13"/>
+    <p:notesMasterId r:id="rId14"/>
   </p:notesMasterIdLst>
   <p:sldIdLst>
     <p:sldId id="262" r:id="rId2"/>
     <p:sldId id="264" r:id="rId3"/>
-    <p:sldId id="263" r:id="rId4"/>
-    <p:sldId id="265" r:id="rId5"/>
-    <p:sldId id="267" r:id="rId6"/>
-    <p:sldId id="266" r:id="rId7"/>
-    <p:sldId id="268" r:id="rId8"/>
-    <p:sldId id="269" r:id="rId9"/>
-    <p:sldId id="272" r:id="rId10"/>
-    <p:sldId id="270" r:id="rId11"/>
-    <p:sldId id="271" r:id="rId12"/>
+    <p:sldId id="273" r:id="rId4"/>
+    <p:sldId id="263" r:id="rId5"/>
+    <p:sldId id="265" r:id="rId6"/>
+    <p:sldId id="267" r:id="rId7"/>
+    <p:sldId id="266" r:id="rId8"/>
+    <p:sldId id="268" r:id="rId9"/>
+    <p:sldId id="269" r:id="rId10"/>
+    <p:sldId id="272" r:id="rId11"/>
+    <p:sldId id="270" r:id="rId12"/>
+    <p:sldId id="271" r:id="rId13"/>
   </p:sldIdLst>
   <p:sldSz cx="12192000" cy="6858000"/>
   <p:notesSz cx="7102475" cy="10234613"/>
@@ -128,6 +129,7 @@
         <p14:section name="micro:bit" id="{172194C1-BB1B-4A4D-B985-CC8AF15F9346}">
           <p14:sldIdLst>
             <p14:sldId id="264"/>
+            <p14:sldId id="273"/>
           </p14:sldIdLst>
         </p14:section>
         <p14:section name="Morse Code" id="{51437BB4-8CFF-4FB8-9774-B27354A75F73}">
@@ -173,14 +175,6 @@
 </p:cmAuthorLst>
 </file>
 
-<file path=ppt/revisionInfo.xml><?xml version="1.0" encoding="utf-8"?>
-<p1510:revInfo xmlns:a="http://schemas.openxmlformats.org/drawingml/2006/main" xmlns:r="http://schemas.openxmlformats.org/officeDocument/2006/relationships" xmlns:p1510="http://schemas.microsoft.com/office/powerpoint/2015/10/main">
-  <p1510:revLst>
-    <p1510:client id="{858C20F7-B2D2-42EC-A58B-025050ABFACB}" v="340" dt="2025-05-12T19:11:41.992"/>
-  </p1510:revLst>
-</p1510:revInfo>
-</file>
-
 <file path=ppt/notesMasters/notesMaster1.xml><?xml version="1.0" encoding="utf-8"?>
 <p:notesMaster xmlns:a="http://schemas.openxmlformats.org/drawingml/2006/main" xmlns:r="http://schemas.openxmlformats.org/officeDocument/2006/relationships" xmlns:p="http://schemas.openxmlformats.org/presentationml/2006/main">
   <p:cSld>
@@ -263,7 +257,7 @@
           <a:p>
             <a:fld id="{0E35528A-819C-4AD3-BDC3-2CDCE7BEAF53}" type="datetimeFigureOut">
               <a:rPr lang="en-GB" smtClean="0"/>
-              <a:t>13/05/2025</a:t>
+              <a:t>24/02/2026</a:t>
             </a:fld>
             <a:endParaRPr lang="en-GB"/>
           </a:p>
@@ -706,7 +700,7 @@
           <a:p>
             <a:fld id="{B71FE5B5-A979-4370-A255-218EAB36A5F4}" type="slidenum">
               <a:rPr lang="en-GB" smtClean="0"/>
-              <a:t>4</a:t>
+              <a:t>5</a:t>
             </a:fld>
             <a:endParaRPr lang="en-GB"/>
           </a:p>
@@ -793,7 +787,7 @@
           <a:p>
             <a:fld id="{B71FE5B5-A979-4370-A255-218EAB36A5F4}" type="slidenum">
               <a:rPr lang="en-GB" smtClean="0"/>
-              <a:t>5</a:t>
+              <a:t>6</a:t>
             </a:fld>
             <a:endParaRPr lang="en-GB"/>
           </a:p>
@@ -898,7 +892,7 @@
           <a:p>
             <a:fld id="{B71FE5B5-A979-4370-A255-218EAB36A5F4}" type="slidenum">
               <a:rPr lang="en-GB" smtClean="0"/>
-              <a:t>6</a:t>
+              <a:t>7</a:t>
             </a:fld>
             <a:endParaRPr lang="en-GB"/>
           </a:p>
@@ -990,7 +984,7 @@
           <a:p>
             <a:fld id="{B71FE5B5-A979-4370-A255-218EAB36A5F4}" type="slidenum">
               <a:rPr lang="en-GB" smtClean="0"/>
-              <a:t>7</a:t>
+              <a:t>8</a:t>
             </a:fld>
             <a:endParaRPr lang="en-GB"/>
           </a:p>
@@ -1101,7 +1095,7 @@
           <a:p>
             <a:fld id="{B71FE5B5-A979-4370-A255-218EAB36A5F4}" type="slidenum">
               <a:rPr lang="en-GB" smtClean="0"/>
-              <a:t>9</a:t>
+              <a:t>10</a:t>
             </a:fld>
             <a:endParaRPr lang="en-GB"/>
           </a:p>
@@ -1209,7 +1203,7 @@
           <a:p>
             <a:fld id="{B71FE5B5-A979-4370-A255-218EAB36A5F4}" type="slidenum">
               <a:rPr lang="en-GB" smtClean="0"/>
-              <a:t>10</a:t>
+              <a:t>11</a:t>
             </a:fld>
             <a:endParaRPr lang="en-GB"/>
           </a:p>
@@ -1317,7 +1311,7 @@
           <a:p>
             <a:fld id="{B71FE5B5-A979-4370-A255-218EAB36A5F4}" type="slidenum">
               <a:rPr lang="en-GB" smtClean="0"/>
-              <a:t>11</a:t>
+              <a:t>12</a:t>
             </a:fld>
             <a:endParaRPr lang="en-GB"/>
           </a:p>
@@ -1485,7 +1479,7 @@
           <a:p>
             <a:fld id="{CBBB66F6-7471-47DA-8EED-C7BCCA53B015}" type="datetimeFigureOut">
               <a:rPr lang="en-GB" smtClean="0"/>
-              <a:t>13/05/2025</a:t>
+              <a:t>24/02/2026</a:t>
             </a:fld>
             <a:endParaRPr lang="en-GB"/>
           </a:p>
@@ -1701,7 +1695,7 @@
           <a:p>
             <a:fld id="{CBBB66F6-7471-47DA-8EED-C7BCCA53B015}" type="datetimeFigureOut">
               <a:rPr lang="en-GB" smtClean="0"/>
-              <a:t>13/05/2025</a:t>
+              <a:t>24/02/2026</a:t>
             </a:fld>
             <a:endParaRPr lang="en-GB"/>
           </a:p>
@@ -1911,7 +1905,7 @@
           <a:p>
             <a:fld id="{CBBB66F6-7471-47DA-8EED-C7BCCA53B015}" type="datetimeFigureOut">
               <a:rPr lang="en-GB" smtClean="0"/>
-              <a:t>13/05/2025</a:t>
+              <a:t>24/02/2026</a:t>
             </a:fld>
             <a:endParaRPr lang="en-GB"/>
           </a:p>
@@ -2157,7 +2151,7 @@
           <a:p>
             <a:fld id="{CBBB66F6-7471-47DA-8EED-C7BCCA53B015}" type="datetimeFigureOut">
               <a:rPr lang="en-GB" smtClean="0"/>
-              <a:t>13/05/2025</a:t>
+              <a:t>24/02/2026</a:t>
             </a:fld>
             <a:endParaRPr lang="en-GB"/>
           </a:p>
@@ -2449,7 +2443,7 @@
           <a:p>
             <a:fld id="{CBBB66F6-7471-47DA-8EED-C7BCCA53B015}" type="datetimeFigureOut">
               <a:rPr lang="en-GB" smtClean="0"/>
-              <a:t>13/05/2025</a:t>
+              <a:t>24/02/2026</a:t>
             </a:fld>
             <a:endParaRPr lang="en-GB"/>
           </a:p>
@@ -2809,7 +2803,7 @@
           <a:p>
             <a:fld id="{CBBB66F6-7471-47DA-8EED-C7BCCA53B015}" type="datetimeFigureOut">
               <a:rPr lang="en-GB" smtClean="0"/>
-              <a:t>13/05/2025</a:t>
+              <a:t>24/02/2026</a:t>
             </a:fld>
             <a:endParaRPr lang="en-GB"/>
           </a:p>
@@ -3316,7 +3310,7 @@
           <a:p>
             <a:fld id="{CBBB66F6-7471-47DA-8EED-C7BCCA53B015}" type="datetimeFigureOut">
               <a:rPr lang="en-GB" smtClean="0"/>
-              <a:t>13/05/2025</a:t>
+              <a:t>24/02/2026</a:t>
             </a:fld>
             <a:endParaRPr lang="en-GB"/>
           </a:p>
@@ -3474,7 +3468,7 @@
           <a:p>
             <a:fld id="{CBBB66F6-7471-47DA-8EED-C7BCCA53B015}" type="datetimeFigureOut">
               <a:rPr lang="en-GB" smtClean="0"/>
-              <a:t>13/05/2025</a:t>
+              <a:t>24/02/2026</a:t>
             </a:fld>
             <a:endParaRPr lang="en-GB"/>
           </a:p>
@@ -3603,7 +3597,7 @@
           <a:p>
             <a:fld id="{CBBB66F6-7471-47DA-8EED-C7BCCA53B015}" type="datetimeFigureOut">
               <a:rPr lang="en-GB" smtClean="0"/>
-              <a:t>13/05/2025</a:t>
+              <a:t>24/02/2026</a:t>
             </a:fld>
             <a:endParaRPr lang="en-GB"/>
           </a:p>
@@ -3946,7 +3940,7 @@
           <a:p>
             <a:fld id="{CBBB66F6-7471-47DA-8EED-C7BCCA53B015}" type="datetimeFigureOut">
               <a:rPr lang="en-GB" smtClean="0"/>
-              <a:t>13/05/2025</a:t>
+              <a:t>24/02/2026</a:t>
             </a:fld>
             <a:endParaRPr lang="en-GB"/>
           </a:p>
@@ -4235,7 +4229,7 @@
           <a:p>
             <a:fld id="{CBBB66F6-7471-47DA-8EED-C7BCCA53B015}" type="datetimeFigureOut">
               <a:rPr lang="en-GB" smtClean="0"/>
-              <a:t>13/05/2025</a:t>
+              <a:t>24/02/2026</a:t>
             </a:fld>
             <a:endParaRPr lang="en-GB"/>
           </a:p>
@@ -4482,7 +4476,7 @@
           <a:p>
             <a:fld id="{CBBB66F6-7471-47DA-8EED-C7BCCA53B015}" type="datetimeFigureOut">
               <a:rPr lang="en-GB" noProof="0" smtClean="0"/>
-              <a:t>13/05/2025</a:t>
+              <a:t>24/02/2026</a:t>
             </a:fld>
             <a:endParaRPr lang="en-GB" noProof="0" dirty="0"/>
           </a:p>
@@ -5015,6 +5009,506 @@
           <a:p>
             <a:r>
               <a:rPr lang="en-GB" dirty="0"/>
+              <a:t>Bronze Award</a:t>
+            </a:r>
+          </a:p>
+        </p:txBody>
+      </p:sp>
+      <p:sp>
+        <p:nvSpPr>
+          <p:cNvPr id="3" name="Content Placeholder 2">
+            <a:extLst>
+              <a:ext uri="{FF2B5EF4-FFF2-40B4-BE49-F238E27FC236}">
+                <a16:creationId xmlns:a16="http://schemas.microsoft.com/office/drawing/2014/main" id="{C2025B6F-5918-AEC0-2CC2-248B1B81F7DD}"/>
+              </a:ext>
+            </a:extLst>
+          </p:cNvPr>
+          <p:cNvSpPr>
+            <a:spLocks noGrp="1"/>
+          </p:cNvSpPr>
+          <p:nvPr>
+            <p:ph idx="1"/>
+          </p:nvPr>
+        </p:nvSpPr>
+        <p:spPr/>
+        <p:txBody>
+          <a:bodyPr>
+            <a:normAutofit/>
+          </a:bodyPr>
+          <a:lstStyle/>
+          <a:p>
+            <a:r>
+              <a:rPr lang="en-GB" sz="4000" dirty="0"/>
+              <a:t>Award: </a:t>
+            </a:r>
+            <a:r>
+              <a:rPr lang="en-GB" sz="4000" dirty="0">
+                <a:solidFill>
+                  <a:srgbClr val="7030A0"/>
+                </a:solidFill>
+              </a:rPr>
+              <a:t>250 points</a:t>
+            </a:r>
+          </a:p>
+          <a:p>
+            <a:pPr lvl="1"/>
+            <a:r>
+              <a:rPr lang="en-GB" sz="4000" dirty="0"/>
+              <a:t>Citizen: </a:t>
+            </a:r>
+            <a:r>
+              <a:rPr lang="en-GB" sz="4000" dirty="0">
+                <a:solidFill>
+                  <a:srgbClr val="7030A0"/>
+                </a:solidFill>
+              </a:rPr>
+              <a:t>50 points</a:t>
+            </a:r>
+          </a:p>
+          <a:p>
+            <a:pPr lvl="1"/>
+            <a:r>
+              <a:rPr lang="en-GB" sz="4000" dirty="0"/>
+              <a:t>Worker: </a:t>
+            </a:r>
+            <a:r>
+              <a:rPr lang="en-GB" sz="4000" dirty="0">
+                <a:solidFill>
+                  <a:srgbClr val="7030A0"/>
+                </a:solidFill>
+              </a:rPr>
+              <a:t>50 points</a:t>
+            </a:r>
+          </a:p>
+          <a:p>
+            <a:pPr lvl="1"/>
+            <a:r>
+              <a:rPr lang="en-GB" sz="4000" dirty="0"/>
+              <a:t>Maker: </a:t>
+            </a:r>
+            <a:r>
+              <a:rPr lang="en-GB" sz="4000" dirty="0">
+                <a:solidFill>
+                  <a:srgbClr val="7030A0"/>
+                </a:solidFill>
+              </a:rPr>
+              <a:t>50 points</a:t>
+            </a:r>
+          </a:p>
+          <a:p>
+            <a:pPr lvl="1"/>
+            <a:r>
+              <a:rPr lang="en-GB" sz="4000" dirty="0"/>
+              <a:t>Entrepreneur: </a:t>
+            </a:r>
+            <a:r>
+              <a:rPr lang="en-GB" sz="4000" dirty="0">
+                <a:solidFill>
+                  <a:srgbClr val="7030A0"/>
+                </a:solidFill>
+              </a:rPr>
+              <a:t>50 points</a:t>
+            </a:r>
+          </a:p>
+        </p:txBody>
+      </p:sp>
+    </p:spTree>
+    <p:extLst>
+      <p:ext uri="{BB962C8B-B14F-4D97-AF65-F5344CB8AC3E}">
+        <p14:creationId xmlns:p14="http://schemas.microsoft.com/office/powerpoint/2010/main" val="155606597"/>
+      </p:ext>
+    </p:extLst>
+  </p:cSld>
+  <p:clrMapOvr>
+    <a:masterClrMapping/>
+  </p:clrMapOvr>
+  <p:timing>
+    <p:tnLst>
+      <p:par>
+        <p:cTn id="1" dur="indefinite" restart="never" nodeType="tmRoot">
+          <p:childTnLst>
+            <p:seq concurrent="1" nextAc="seek">
+              <p:cTn id="2" dur="indefinite" nodeType="mainSeq">
+                <p:childTnLst>
+                  <p:par>
+                    <p:cTn id="3" fill="hold">
+                      <p:stCondLst>
+                        <p:cond delay="indefinite"/>
+                      </p:stCondLst>
+                      <p:childTnLst>
+                        <p:par>
+                          <p:cTn id="4" fill="hold">
+                            <p:stCondLst>
+                              <p:cond delay="0"/>
+                            </p:stCondLst>
+                            <p:childTnLst>
+                              <p:par>
+                                <p:cTn id="5" presetID="22" presetClass="entr" presetSubtype="8" fill="hold" grpId="0" nodeType="clickEffect">
+                                  <p:stCondLst>
+                                    <p:cond delay="0"/>
+                                  </p:stCondLst>
+                                  <p:childTnLst>
+                                    <p:set>
+                                      <p:cBhvr>
+                                        <p:cTn id="6" dur="1" fill="hold">
+                                          <p:stCondLst>
+                                            <p:cond delay="0"/>
+                                          </p:stCondLst>
+                                        </p:cTn>
+                                        <p:tgtEl>
+                                          <p:spTgt spid="3">
+                                            <p:txEl>
+                                              <p:pRg st="0" end="0"/>
+                                            </p:txEl>
+                                          </p:spTgt>
+                                        </p:tgtEl>
+                                        <p:attrNameLst>
+                                          <p:attrName>style.visibility</p:attrName>
+                                        </p:attrNameLst>
+                                      </p:cBhvr>
+                                      <p:to>
+                                        <p:strVal val="visible"/>
+                                      </p:to>
+                                    </p:set>
+                                    <p:animEffect transition="in" filter="wipe(left)">
+                                      <p:cBhvr>
+                                        <p:cTn id="7" dur="1500"/>
+                                        <p:tgtEl>
+                                          <p:spTgt spid="3">
+                                            <p:txEl>
+                                              <p:pRg st="0" end="0"/>
+                                            </p:txEl>
+                                          </p:spTgt>
+                                        </p:tgtEl>
+                                      </p:cBhvr>
+                                    </p:animEffect>
+                                  </p:childTnLst>
+                                </p:cTn>
+                              </p:par>
+                            </p:childTnLst>
+                          </p:cTn>
+                        </p:par>
+                      </p:childTnLst>
+                    </p:cTn>
+                  </p:par>
+                  <p:par>
+                    <p:cTn id="8" fill="hold">
+                      <p:stCondLst>
+                        <p:cond delay="indefinite"/>
+                      </p:stCondLst>
+                      <p:childTnLst>
+                        <p:par>
+                          <p:cTn id="9" fill="hold">
+                            <p:stCondLst>
+                              <p:cond delay="0"/>
+                            </p:stCondLst>
+                            <p:childTnLst>
+                              <p:par>
+                                <p:cTn id="10" presetID="22" presetClass="entr" presetSubtype="8" fill="hold" grpId="0" nodeType="clickEffect">
+                                  <p:stCondLst>
+                                    <p:cond delay="0"/>
+                                  </p:stCondLst>
+                                  <p:childTnLst>
+                                    <p:set>
+                                      <p:cBhvr>
+                                        <p:cTn id="11" dur="1" fill="hold">
+                                          <p:stCondLst>
+                                            <p:cond delay="0"/>
+                                          </p:stCondLst>
+                                        </p:cTn>
+                                        <p:tgtEl>
+                                          <p:spTgt spid="3">
+                                            <p:txEl>
+                                              <p:pRg st="1" end="1"/>
+                                            </p:txEl>
+                                          </p:spTgt>
+                                        </p:tgtEl>
+                                        <p:attrNameLst>
+                                          <p:attrName>style.visibility</p:attrName>
+                                        </p:attrNameLst>
+                                      </p:cBhvr>
+                                      <p:to>
+                                        <p:strVal val="visible"/>
+                                      </p:to>
+                                    </p:set>
+                                    <p:animEffect transition="in" filter="wipe(left)">
+                                      <p:cBhvr>
+                                        <p:cTn id="12" dur="2500"/>
+                                        <p:tgtEl>
+                                          <p:spTgt spid="3">
+                                            <p:txEl>
+                                              <p:pRg st="1" end="1"/>
+                                            </p:txEl>
+                                          </p:spTgt>
+                                        </p:tgtEl>
+                                      </p:cBhvr>
+                                    </p:animEffect>
+                                  </p:childTnLst>
+                                </p:cTn>
+                              </p:par>
+                            </p:childTnLst>
+                          </p:cTn>
+                        </p:par>
+                      </p:childTnLst>
+                    </p:cTn>
+                  </p:par>
+                  <p:par>
+                    <p:cTn id="13" fill="hold">
+                      <p:stCondLst>
+                        <p:cond delay="indefinite"/>
+                      </p:stCondLst>
+                      <p:childTnLst>
+                        <p:par>
+                          <p:cTn id="14" fill="hold">
+                            <p:stCondLst>
+                              <p:cond delay="0"/>
+                            </p:stCondLst>
+                            <p:childTnLst>
+                              <p:par>
+                                <p:cTn id="15" presetID="22" presetClass="entr" presetSubtype="8" fill="hold" grpId="0" nodeType="clickEffect">
+                                  <p:stCondLst>
+                                    <p:cond delay="0"/>
+                                  </p:stCondLst>
+                                  <p:childTnLst>
+                                    <p:set>
+                                      <p:cBhvr>
+                                        <p:cTn id="16" dur="1" fill="hold">
+                                          <p:stCondLst>
+                                            <p:cond delay="0"/>
+                                          </p:stCondLst>
+                                        </p:cTn>
+                                        <p:tgtEl>
+                                          <p:spTgt spid="3">
+                                            <p:txEl>
+                                              <p:pRg st="2" end="2"/>
+                                            </p:txEl>
+                                          </p:spTgt>
+                                        </p:tgtEl>
+                                        <p:attrNameLst>
+                                          <p:attrName>style.visibility</p:attrName>
+                                        </p:attrNameLst>
+                                      </p:cBhvr>
+                                      <p:to>
+                                        <p:strVal val="visible"/>
+                                      </p:to>
+                                    </p:set>
+                                    <p:animEffect transition="in" filter="wipe(left)">
+                                      <p:cBhvr>
+                                        <p:cTn id="17" dur="1500"/>
+                                        <p:tgtEl>
+                                          <p:spTgt spid="3">
+                                            <p:txEl>
+                                              <p:pRg st="2" end="2"/>
+                                            </p:txEl>
+                                          </p:spTgt>
+                                        </p:tgtEl>
+                                      </p:cBhvr>
+                                    </p:animEffect>
+                                  </p:childTnLst>
+                                </p:cTn>
+                              </p:par>
+                            </p:childTnLst>
+                          </p:cTn>
+                        </p:par>
+                      </p:childTnLst>
+                    </p:cTn>
+                  </p:par>
+                  <p:par>
+                    <p:cTn id="18" fill="hold">
+                      <p:stCondLst>
+                        <p:cond delay="indefinite"/>
+                      </p:stCondLst>
+                      <p:childTnLst>
+                        <p:par>
+                          <p:cTn id="19" fill="hold">
+                            <p:stCondLst>
+                              <p:cond delay="0"/>
+                            </p:stCondLst>
+                            <p:childTnLst>
+                              <p:par>
+                                <p:cTn id="20" presetID="22" presetClass="entr" presetSubtype="8" fill="hold" grpId="0" nodeType="clickEffect">
+                                  <p:stCondLst>
+                                    <p:cond delay="0"/>
+                                  </p:stCondLst>
+                                  <p:childTnLst>
+                                    <p:set>
+                                      <p:cBhvr>
+                                        <p:cTn id="21" dur="1" fill="hold">
+                                          <p:stCondLst>
+                                            <p:cond delay="0"/>
+                                          </p:stCondLst>
+                                        </p:cTn>
+                                        <p:tgtEl>
+                                          <p:spTgt spid="3">
+                                            <p:txEl>
+                                              <p:pRg st="3" end="3"/>
+                                            </p:txEl>
+                                          </p:spTgt>
+                                        </p:tgtEl>
+                                        <p:attrNameLst>
+                                          <p:attrName>style.visibility</p:attrName>
+                                        </p:attrNameLst>
+                                      </p:cBhvr>
+                                      <p:to>
+                                        <p:strVal val="visible"/>
+                                      </p:to>
+                                    </p:set>
+                                    <p:animEffect transition="in" filter="wipe(left)">
+                                      <p:cBhvr>
+                                        <p:cTn id="22" dur="2500"/>
+                                        <p:tgtEl>
+                                          <p:spTgt spid="3">
+                                            <p:txEl>
+                                              <p:pRg st="3" end="3"/>
+                                            </p:txEl>
+                                          </p:spTgt>
+                                        </p:tgtEl>
+                                      </p:cBhvr>
+                                    </p:animEffect>
+                                  </p:childTnLst>
+                                </p:cTn>
+                              </p:par>
+                            </p:childTnLst>
+                          </p:cTn>
+                        </p:par>
+                      </p:childTnLst>
+                    </p:cTn>
+                  </p:par>
+                  <p:par>
+                    <p:cTn id="23" fill="hold">
+                      <p:stCondLst>
+                        <p:cond delay="indefinite"/>
+                      </p:stCondLst>
+                      <p:childTnLst>
+                        <p:par>
+                          <p:cTn id="24" fill="hold">
+                            <p:stCondLst>
+                              <p:cond delay="0"/>
+                            </p:stCondLst>
+                            <p:childTnLst>
+                              <p:par>
+                                <p:cTn id="25" presetID="22" presetClass="entr" presetSubtype="8" fill="hold" grpId="0" nodeType="clickEffect">
+                                  <p:stCondLst>
+                                    <p:cond delay="0"/>
+                                  </p:stCondLst>
+                                  <p:childTnLst>
+                                    <p:set>
+                                      <p:cBhvr>
+                                        <p:cTn id="26" dur="1" fill="hold">
+                                          <p:stCondLst>
+                                            <p:cond delay="0"/>
+                                          </p:stCondLst>
+                                        </p:cTn>
+                                        <p:tgtEl>
+                                          <p:spTgt spid="3">
+                                            <p:txEl>
+                                              <p:pRg st="4" end="4"/>
+                                            </p:txEl>
+                                          </p:spTgt>
+                                        </p:tgtEl>
+                                        <p:attrNameLst>
+                                          <p:attrName>style.visibility</p:attrName>
+                                        </p:attrNameLst>
+                                      </p:cBhvr>
+                                      <p:to>
+                                        <p:strVal val="visible"/>
+                                      </p:to>
+                                    </p:set>
+                                    <p:animEffect transition="in" filter="wipe(left)">
+                                      <p:cBhvr>
+                                        <p:cTn id="27" dur="2500"/>
+                                        <p:tgtEl>
+                                          <p:spTgt spid="3">
+                                            <p:txEl>
+                                              <p:pRg st="4" end="4"/>
+                                            </p:txEl>
+                                          </p:spTgt>
+                                        </p:tgtEl>
+                                      </p:cBhvr>
+                                    </p:animEffect>
+                                  </p:childTnLst>
+                                </p:cTn>
+                              </p:par>
+                            </p:childTnLst>
+                          </p:cTn>
+                        </p:par>
+                      </p:childTnLst>
+                    </p:cTn>
+                  </p:par>
+                </p:childTnLst>
+              </p:cTn>
+              <p:prevCondLst>
+                <p:cond evt="onPrev" delay="0">
+                  <p:tgtEl>
+                    <p:sldTgt/>
+                  </p:tgtEl>
+                </p:cond>
+              </p:prevCondLst>
+              <p:nextCondLst>
+                <p:cond evt="onNext" delay="0">
+                  <p:tgtEl>
+                    <p:sldTgt/>
+                  </p:tgtEl>
+                </p:cond>
+              </p:nextCondLst>
+            </p:seq>
+          </p:childTnLst>
+        </p:cTn>
+      </p:par>
+    </p:tnLst>
+    <p:bldLst>
+      <p:bldP spid="3" grpId="0" uiExpand="1" build="p"/>
+    </p:bldLst>
+  </p:timing>
+</p:sld>
+</file>
+
+<file path=ppt/slides/slide11.xml><?xml version="1.0" encoding="utf-8"?>
+<p:sld xmlns:a="http://schemas.openxmlformats.org/drawingml/2006/main" xmlns:r="http://schemas.openxmlformats.org/officeDocument/2006/relationships" xmlns:p="http://schemas.openxmlformats.org/presentationml/2006/main">
+  <p:cSld>
+    <p:spTree>
+      <p:nvGrpSpPr>
+        <p:cNvPr id="1" name="">
+          <a:extLst>
+            <a:ext uri="{FF2B5EF4-FFF2-40B4-BE49-F238E27FC236}">
+              <a16:creationId xmlns:a16="http://schemas.microsoft.com/office/drawing/2014/main" id="{EA2AA212-8D61-7E0A-251F-1EA18250BF99}"/>
+            </a:ext>
+          </a:extLst>
+        </p:cNvPr>
+        <p:cNvGrpSpPr/>
+        <p:nvPr/>
+      </p:nvGrpSpPr>
+      <p:grpSpPr>
+        <a:xfrm>
+          <a:off x="0" y="0"/>
+          <a:ext cx="0" cy="0"/>
+          <a:chOff x="0" y="0"/>
+          <a:chExt cx="0" cy="0"/>
+        </a:xfrm>
+      </p:grpSpPr>
+      <p:sp>
+        <p:nvSpPr>
+          <p:cNvPr id="2" name="Title 1">
+            <a:extLst>
+              <a:ext uri="{FF2B5EF4-FFF2-40B4-BE49-F238E27FC236}">
+                <a16:creationId xmlns:a16="http://schemas.microsoft.com/office/drawing/2014/main" id="{BD8E1C6B-788B-C8A6-B07D-8BE93BA4208B}"/>
+              </a:ext>
+            </a:extLst>
+          </p:cNvPr>
+          <p:cNvSpPr>
+            <a:spLocks noGrp="1"/>
+          </p:cNvSpPr>
+          <p:nvPr>
+            <p:ph type="title"/>
+          </p:nvPr>
+        </p:nvSpPr>
+        <p:spPr/>
+        <p:txBody>
+          <a:bodyPr/>
+          <a:lstStyle/>
+          <a:p>
+            <a:r>
+              <a:rPr lang="en-GB" dirty="0"/>
               <a:t>Sign Up (1)</a:t>
             </a:r>
           </a:p>
@@ -5097,7 +5591,7 @@
                   <a:srgbClr val="7030A0"/>
                 </a:solidFill>
               </a:rPr>
-              <a:t>S1_2024-25</a:t>
+              <a:t>S1_2025-26</a:t>
             </a:r>
           </a:p>
           <a:p>
@@ -5482,7 +5976,7 @@
 </p:sld>
 </file>
 
-<file path=ppt/slides/slide11.xml><?xml version="1.0" encoding="utf-8"?>
+<file path=ppt/slides/slide12.xml><?xml version="1.0" encoding="utf-8"?>
 <p:sld xmlns:a="http://schemas.openxmlformats.org/drawingml/2006/main" xmlns:r="http://schemas.openxmlformats.org/officeDocument/2006/relationships" xmlns:p="http://schemas.openxmlformats.org/presentationml/2006/main">
   <p:cSld>
     <p:spTree>
@@ -5594,7 +6088,7 @@
                   <a:srgbClr val="7030A0"/>
                 </a:solidFill>
               </a:rPr>
-              <a:t>S1_2024-25</a:t>
+              <a:t>S1_2025-26</a:t>
             </a:r>
           </a:p>
           <a:p>
@@ -6193,6 +6687,115 @@
           <p:cNvPr id="2" name="Title 1">
             <a:extLst>
               <a:ext uri="{FF2B5EF4-FFF2-40B4-BE49-F238E27FC236}">
+                <a16:creationId xmlns:a16="http://schemas.microsoft.com/office/drawing/2014/main" id="{DBF12148-9529-439E-8A83-D89C6D31010B}"/>
+              </a:ext>
+            </a:extLst>
+          </p:cNvPr>
+          <p:cNvSpPr>
+            <a:spLocks noGrp="1"/>
+          </p:cNvSpPr>
+          <p:nvPr>
+            <p:ph type="title"/>
+          </p:nvPr>
+        </p:nvSpPr>
+        <p:spPr/>
+        <p:txBody>
+          <a:bodyPr/>
+          <a:lstStyle/>
+          <a:p>
+            <a:r>
+              <a:rPr lang="en-GB" dirty="0" err="1"/>
+              <a:t>micro:bit</a:t>
+            </a:r>
+            <a:endParaRPr lang="en-GB" dirty="0"/>
+          </a:p>
+        </p:txBody>
+      </p:sp>
+      <p:sp>
+        <p:nvSpPr>
+          <p:cNvPr id="3" name="Content Placeholder 2">
+            <a:extLst>
+              <a:ext uri="{FF2B5EF4-FFF2-40B4-BE49-F238E27FC236}">
+                <a16:creationId xmlns:a16="http://schemas.microsoft.com/office/drawing/2014/main" id="{8DE9DF13-812A-4C28-B550-1C58865628DD}"/>
+              </a:ext>
+            </a:extLst>
+          </p:cNvPr>
+          <p:cNvSpPr>
+            <a:spLocks noGrp="1"/>
+          </p:cNvSpPr>
+          <p:nvPr>
+            <p:ph sz="half" idx="1"/>
+          </p:nvPr>
+        </p:nvSpPr>
+        <p:spPr/>
+        <p:txBody>
+          <a:bodyPr/>
+          <a:lstStyle/>
+          <a:p>
+            <a:endParaRPr lang="en-GB"/>
+          </a:p>
+        </p:txBody>
+      </p:sp>
+      <p:sp>
+        <p:nvSpPr>
+          <p:cNvPr id="4" name="Content Placeholder 3">
+            <a:extLst>
+              <a:ext uri="{FF2B5EF4-FFF2-40B4-BE49-F238E27FC236}">
+                <a16:creationId xmlns:a16="http://schemas.microsoft.com/office/drawing/2014/main" id="{1DE12837-F442-4F47-9ABC-ACC0A71288E3}"/>
+              </a:ext>
+            </a:extLst>
+          </p:cNvPr>
+          <p:cNvSpPr>
+            <a:spLocks noGrp="1"/>
+          </p:cNvSpPr>
+          <p:nvPr>
+            <p:ph sz="half" idx="2"/>
+          </p:nvPr>
+        </p:nvSpPr>
+        <p:spPr/>
+        <p:txBody>
+          <a:bodyPr/>
+          <a:lstStyle/>
+          <a:p>
+            <a:endParaRPr lang="en-GB"/>
+          </a:p>
+        </p:txBody>
+      </p:sp>
+    </p:spTree>
+    <p:extLst>
+      <p:ext uri="{BB962C8B-B14F-4D97-AF65-F5344CB8AC3E}">
+        <p14:creationId xmlns:p14="http://schemas.microsoft.com/office/powerpoint/2010/main" val="2048563090"/>
+      </p:ext>
+    </p:extLst>
+  </p:cSld>
+  <p:clrMapOvr>
+    <a:masterClrMapping/>
+  </p:clrMapOvr>
+</p:sld>
+</file>
+
+<file path=ppt/slides/slide4.xml><?xml version="1.0" encoding="utf-8"?>
+<p:sld xmlns:a="http://schemas.openxmlformats.org/drawingml/2006/main" xmlns:r="http://schemas.openxmlformats.org/officeDocument/2006/relationships" xmlns:p="http://schemas.openxmlformats.org/presentationml/2006/main">
+  <p:cSld>
+    <p:spTree>
+      <p:nvGrpSpPr>
+        <p:cNvPr id="1" name=""/>
+        <p:cNvGrpSpPr/>
+        <p:nvPr/>
+      </p:nvGrpSpPr>
+      <p:grpSpPr>
+        <a:xfrm>
+          <a:off x="0" y="0"/>
+          <a:ext cx="0" cy="0"/>
+          <a:chOff x="0" y="0"/>
+          <a:chExt cx="0" cy="0"/>
+        </a:xfrm>
+      </p:grpSpPr>
+      <p:sp>
+        <p:nvSpPr>
+          <p:cNvPr id="2" name="Title 1">
+            <a:extLst>
+              <a:ext uri="{FF2B5EF4-FFF2-40B4-BE49-F238E27FC236}">
                 <a16:creationId xmlns:a16="http://schemas.microsoft.com/office/drawing/2014/main" id="{B2B0FB59-6DD7-4566-9473-3C5EEAA75AD3}"/>
               </a:ext>
             </a:extLst>
@@ -6254,7 +6857,7 @@
 </p:sld>
 </file>
 
-<file path=ppt/slides/slide4.xml><?xml version="1.0" encoding="utf-8"?>
+<file path=ppt/slides/slide5.xml><?xml version="1.0" encoding="utf-8"?>
 <p:sld xmlns:a="http://schemas.openxmlformats.org/drawingml/2006/main" xmlns:r="http://schemas.openxmlformats.org/officeDocument/2006/relationships" xmlns:p="http://schemas.openxmlformats.org/presentationml/2006/main">
   <p:cSld>
     <p:spTree>
@@ -7152,7 +7755,7 @@
 </p:sld>
 </file>
 
-<file path=ppt/slides/slide5.xml><?xml version="1.0" encoding="utf-8"?>
+<file path=ppt/slides/slide6.xml><?xml version="1.0" encoding="utf-8"?>
 <p:sld xmlns:a="http://schemas.openxmlformats.org/drawingml/2006/main" xmlns:r="http://schemas.openxmlformats.org/officeDocument/2006/relationships" xmlns:p="http://schemas.openxmlformats.org/presentationml/2006/main">
   <p:cSld>
     <p:spTree>
@@ -8212,7 +8815,7 @@
 </p:sld>
 </file>
 
-<file path=ppt/slides/slide6.xml><?xml version="1.0" encoding="utf-8"?>
+<file path=ppt/slides/slide7.xml><?xml version="1.0" encoding="utf-8"?>
 <p:sld xmlns:a="http://schemas.openxmlformats.org/drawingml/2006/main" xmlns:r="http://schemas.openxmlformats.org/officeDocument/2006/relationships" xmlns:p="http://schemas.openxmlformats.org/presentationml/2006/main">
   <p:cSld>
     <p:spTree>
@@ -9098,7 +9701,7 @@
 </p:sld>
 </file>
 
-<file path=ppt/slides/slide7.xml><?xml version="1.0" encoding="utf-8"?>
+<file path=ppt/slides/slide8.xml><?xml version="1.0" encoding="utf-8"?>
 <p:sld xmlns:a="http://schemas.openxmlformats.org/drawingml/2006/main" xmlns:r="http://schemas.openxmlformats.org/officeDocument/2006/relationships" xmlns:p="http://schemas.openxmlformats.org/presentationml/2006/main">
   <p:cSld>
     <p:spTree>
@@ -9801,7 +10404,7 @@
 </p:sld>
 </file>
 
-<file path=ppt/slides/slide8.xml><?xml version="1.0" encoding="utf-8"?>
+<file path=ppt/slides/slide9.xml><?xml version="1.0" encoding="utf-8"?>
 <p:sld xmlns:a="http://schemas.openxmlformats.org/drawingml/2006/main" xmlns:r="http://schemas.openxmlformats.org/officeDocument/2006/relationships" xmlns:p="http://schemas.openxmlformats.org/presentationml/2006/main">
   <p:cSld>
     <p:spTree>
@@ -9887,506 +10490,6 @@
   <p:clrMapOvr>
     <a:masterClrMapping/>
   </p:clrMapOvr>
-</p:sld>
-</file>
-
-<file path=ppt/slides/slide9.xml><?xml version="1.0" encoding="utf-8"?>
-<p:sld xmlns:a="http://schemas.openxmlformats.org/drawingml/2006/main" xmlns:r="http://schemas.openxmlformats.org/officeDocument/2006/relationships" xmlns:p="http://schemas.openxmlformats.org/presentationml/2006/main">
-  <p:cSld>
-    <p:spTree>
-      <p:nvGrpSpPr>
-        <p:cNvPr id="1" name="">
-          <a:extLst>
-            <a:ext uri="{FF2B5EF4-FFF2-40B4-BE49-F238E27FC236}">
-              <a16:creationId xmlns:a16="http://schemas.microsoft.com/office/drawing/2014/main" id="{EA2AA212-8D61-7E0A-251F-1EA18250BF99}"/>
-            </a:ext>
-          </a:extLst>
-        </p:cNvPr>
-        <p:cNvGrpSpPr/>
-        <p:nvPr/>
-      </p:nvGrpSpPr>
-      <p:grpSpPr>
-        <a:xfrm>
-          <a:off x="0" y="0"/>
-          <a:ext cx="0" cy="0"/>
-          <a:chOff x="0" y="0"/>
-          <a:chExt cx="0" cy="0"/>
-        </a:xfrm>
-      </p:grpSpPr>
-      <p:sp>
-        <p:nvSpPr>
-          <p:cNvPr id="2" name="Title 1">
-            <a:extLst>
-              <a:ext uri="{FF2B5EF4-FFF2-40B4-BE49-F238E27FC236}">
-                <a16:creationId xmlns:a16="http://schemas.microsoft.com/office/drawing/2014/main" id="{BD8E1C6B-788B-C8A6-B07D-8BE93BA4208B}"/>
-              </a:ext>
-            </a:extLst>
-          </p:cNvPr>
-          <p:cNvSpPr>
-            <a:spLocks noGrp="1"/>
-          </p:cNvSpPr>
-          <p:nvPr>
-            <p:ph type="title"/>
-          </p:nvPr>
-        </p:nvSpPr>
-        <p:spPr/>
-        <p:txBody>
-          <a:bodyPr/>
-          <a:lstStyle/>
-          <a:p>
-            <a:r>
-              <a:rPr lang="en-GB" dirty="0"/>
-              <a:t>Bronze Award</a:t>
-            </a:r>
-          </a:p>
-        </p:txBody>
-      </p:sp>
-      <p:sp>
-        <p:nvSpPr>
-          <p:cNvPr id="3" name="Content Placeholder 2">
-            <a:extLst>
-              <a:ext uri="{FF2B5EF4-FFF2-40B4-BE49-F238E27FC236}">
-                <a16:creationId xmlns:a16="http://schemas.microsoft.com/office/drawing/2014/main" id="{C2025B6F-5918-AEC0-2CC2-248B1B81F7DD}"/>
-              </a:ext>
-            </a:extLst>
-          </p:cNvPr>
-          <p:cNvSpPr>
-            <a:spLocks noGrp="1"/>
-          </p:cNvSpPr>
-          <p:nvPr>
-            <p:ph idx="1"/>
-          </p:nvPr>
-        </p:nvSpPr>
-        <p:spPr/>
-        <p:txBody>
-          <a:bodyPr>
-            <a:normAutofit/>
-          </a:bodyPr>
-          <a:lstStyle/>
-          <a:p>
-            <a:r>
-              <a:rPr lang="en-GB" sz="4000" dirty="0"/>
-              <a:t>Award: </a:t>
-            </a:r>
-            <a:r>
-              <a:rPr lang="en-GB" sz="4000" dirty="0">
-                <a:solidFill>
-                  <a:srgbClr val="7030A0"/>
-                </a:solidFill>
-              </a:rPr>
-              <a:t>250 points</a:t>
-            </a:r>
-          </a:p>
-          <a:p>
-            <a:pPr lvl="1"/>
-            <a:r>
-              <a:rPr lang="en-GB" sz="4000" dirty="0"/>
-              <a:t>Citizen: </a:t>
-            </a:r>
-            <a:r>
-              <a:rPr lang="en-GB" sz="4000" dirty="0">
-                <a:solidFill>
-                  <a:srgbClr val="7030A0"/>
-                </a:solidFill>
-              </a:rPr>
-              <a:t>50 points</a:t>
-            </a:r>
-          </a:p>
-          <a:p>
-            <a:pPr lvl="1"/>
-            <a:r>
-              <a:rPr lang="en-GB" sz="4000" dirty="0"/>
-              <a:t>Worker: </a:t>
-            </a:r>
-            <a:r>
-              <a:rPr lang="en-GB" sz="4000" dirty="0">
-                <a:solidFill>
-                  <a:srgbClr val="7030A0"/>
-                </a:solidFill>
-              </a:rPr>
-              <a:t>50 points</a:t>
-            </a:r>
-          </a:p>
-          <a:p>
-            <a:pPr lvl="1"/>
-            <a:r>
-              <a:rPr lang="en-GB" sz="4000" dirty="0"/>
-              <a:t>Maker: </a:t>
-            </a:r>
-            <a:r>
-              <a:rPr lang="en-GB" sz="4000" dirty="0">
-                <a:solidFill>
-                  <a:srgbClr val="7030A0"/>
-                </a:solidFill>
-              </a:rPr>
-              <a:t>50 points</a:t>
-            </a:r>
-          </a:p>
-          <a:p>
-            <a:pPr lvl="1"/>
-            <a:r>
-              <a:rPr lang="en-GB" sz="4000" dirty="0"/>
-              <a:t>Entrepreneur: </a:t>
-            </a:r>
-            <a:r>
-              <a:rPr lang="en-GB" sz="4000" dirty="0">
-                <a:solidFill>
-                  <a:srgbClr val="7030A0"/>
-                </a:solidFill>
-              </a:rPr>
-              <a:t>50 points</a:t>
-            </a:r>
-          </a:p>
-        </p:txBody>
-      </p:sp>
-    </p:spTree>
-    <p:extLst>
-      <p:ext uri="{BB962C8B-B14F-4D97-AF65-F5344CB8AC3E}">
-        <p14:creationId xmlns:p14="http://schemas.microsoft.com/office/powerpoint/2010/main" val="155606597"/>
-      </p:ext>
-    </p:extLst>
-  </p:cSld>
-  <p:clrMapOvr>
-    <a:masterClrMapping/>
-  </p:clrMapOvr>
-  <p:timing>
-    <p:tnLst>
-      <p:par>
-        <p:cTn id="1" dur="indefinite" restart="never" nodeType="tmRoot">
-          <p:childTnLst>
-            <p:seq concurrent="1" nextAc="seek">
-              <p:cTn id="2" dur="indefinite" nodeType="mainSeq">
-                <p:childTnLst>
-                  <p:par>
-                    <p:cTn id="3" fill="hold">
-                      <p:stCondLst>
-                        <p:cond delay="indefinite"/>
-                      </p:stCondLst>
-                      <p:childTnLst>
-                        <p:par>
-                          <p:cTn id="4" fill="hold">
-                            <p:stCondLst>
-                              <p:cond delay="0"/>
-                            </p:stCondLst>
-                            <p:childTnLst>
-                              <p:par>
-                                <p:cTn id="5" presetID="22" presetClass="entr" presetSubtype="8" fill="hold" grpId="0" nodeType="clickEffect">
-                                  <p:stCondLst>
-                                    <p:cond delay="0"/>
-                                  </p:stCondLst>
-                                  <p:childTnLst>
-                                    <p:set>
-                                      <p:cBhvr>
-                                        <p:cTn id="6" dur="1" fill="hold">
-                                          <p:stCondLst>
-                                            <p:cond delay="0"/>
-                                          </p:stCondLst>
-                                        </p:cTn>
-                                        <p:tgtEl>
-                                          <p:spTgt spid="3">
-                                            <p:txEl>
-                                              <p:pRg st="0" end="0"/>
-                                            </p:txEl>
-                                          </p:spTgt>
-                                        </p:tgtEl>
-                                        <p:attrNameLst>
-                                          <p:attrName>style.visibility</p:attrName>
-                                        </p:attrNameLst>
-                                      </p:cBhvr>
-                                      <p:to>
-                                        <p:strVal val="visible"/>
-                                      </p:to>
-                                    </p:set>
-                                    <p:animEffect transition="in" filter="wipe(left)">
-                                      <p:cBhvr>
-                                        <p:cTn id="7" dur="1500"/>
-                                        <p:tgtEl>
-                                          <p:spTgt spid="3">
-                                            <p:txEl>
-                                              <p:pRg st="0" end="0"/>
-                                            </p:txEl>
-                                          </p:spTgt>
-                                        </p:tgtEl>
-                                      </p:cBhvr>
-                                    </p:animEffect>
-                                  </p:childTnLst>
-                                </p:cTn>
-                              </p:par>
-                            </p:childTnLst>
-                          </p:cTn>
-                        </p:par>
-                      </p:childTnLst>
-                    </p:cTn>
-                  </p:par>
-                  <p:par>
-                    <p:cTn id="8" fill="hold">
-                      <p:stCondLst>
-                        <p:cond delay="indefinite"/>
-                      </p:stCondLst>
-                      <p:childTnLst>
-                        <p:par>
-                          <p:cTn id="9" fill="hold">
-                            <p:stCondLst>
-                              <p:cond delay="0"/>
-                            </p:stCondLst>
-                            <p:childTnLst>
-                              <p:par>
-                                <p:cTn id="10" presetID="22" presetClass="entr" presetSubtype="8" fill="hold" grpId="0" nodeType="clickEffect">
-                                  <p:stCondLst>
-                                    <p:cond delay="0"/>
-                                  </p:stCondLst>
-                                  <p:childTnLst>
-                                    <p:set>
-                                      <p:cBhvr>
-                                        <p:cTn id="11" dur="1" fill="hold">
-                                          <p:stCondLst>
-                                            <p:cond delay="0"/>
-                                          </p:stCondLst>
-                                        </p:cTn>
-                                        <p:tgtEl>
-                                          <p:spTgt spid="3">
-                                            <p:txEl>
-                                              <p:pRg st="1" end="1"/>
-                                            </p:txEl>
-                                          </p:spTgt>
-                                        </p:tgtEl>
-                                        <p:attrNameLst>
-                                          <p:attrName>style.visibility</p:attrName>
-                                        </p:attrNameLst>
-                                      </p:cBhvr>
-                                      <p:to>
-                                        <p:strVal val="visible"/>
-                                      </p:to>
-                                    </p:set>
-                                    <p:animEffect transition="in" filter="wipe(left)">
-                                      <p:cBhvr>
-                                        <p:cTn id="12" dur="2500"/>
-                                        <p:tgtEl>
-                                          <p:spTgt spid="3">
-                                            <p:txEl>
-                                              <p:pRg st="1" end="1"/>
-                                            </p:txEl>
-                                          </p:spTgt>
-                                        </p:tgtEl>
-                                      </p:cBhvr>
-                                    </p:animEffect>
-                                  </p:childTnLst>
-                                </p:cTn>
-                              </p:par>
-                            </p:childTnLst>
-                          </p:cTn>
-                        </p:par>
-                      </p:childTnLst>
-                    </p:cTn>
-                  </p:par>
-                  <p:par>
-                    <p:cTn id="13" fill="hold">
-                      <p:stCondLst>
-                        <p:cond delay="indefinite"/>
-                      </p:stCondLst>
-                      <p:childTnLst>
-                        <p:par>
-                          <p:cTn id="14" fill="hold">
-                            <p:stCondLst>
-                              <p:cond delay="0"/>
-                            </p:stCondLst>
-                            <p:childTnLst>
-                              <p:par>
-                                <p:cTn id="15" presetID="22" presetClass="entr" presetSubtype="8" fill="hold" grpId="0" nodeType="clickEffect">
-                                  <p:stCondLst>
-                                    <p:cond delay="0"/>
-                                  </p:stCondLst>
-                                  <p:childTnLst>
-                                    <p:set>
-                                      <p:cBhvr>
-                                        <p:cTn id="16" dur="1" fill="hold">
-                                          <p:stCondLst>
-                                            <p:cond delay="0"/>
-                                          </p:stCondLst>
-                                        </p:cTn>
-                                        <p:tgtEl>
-                                          <p:spTgt spid="3">
-                                            <p:txEl>
-                                              <p:pRg st="2" end="2"/>
-                                            </p:txEl>
-                                          </p:spTgt>
-                                        </p:tgtEl>
-                                        <p:attrNameLst>
-                                          <p:attrName>style.visibility</p:attrName>
-                                        </p:attrNameLst>
-                                      </p:cBhvr>
-                                      <p:to>
-                                        <p:strVal val="visible"/>
-                                      </p:to>
-                                    </p:set>
-                                    <p:animEffect transition="in" filter="wipe(left)">
-                                      <p:cBhvr>
-                                        <p:cTn id="17" dur="1500"/>
-                                        <p:tgtEl>
-                                          <p:spTgt spid="3">
-                                            <p:txEl>
-                                              <p:pRg st="2" end="2"/>
-                                            </p:txEl>
-                                          </p:spTgt>
-                                        </p:tgtEl>
-                                      </p:cBhvr>
-                                    </p:animEffect>
-                                  </p:childTnLst>
-                                </p:cTn>
-                              </p:par>
-                            </p:childTnLst>
-                          </p:cTn>
-                        </p:par>
-                      </p:childTnLst>
-                    </p:cTn>
-                  </p:par>
-                  <p:par>
-                    <p:cTn id="18" fill="hold">
-                      <p:stCondLst>
-                        <p:cond delay="indefinite"/>
-                      </p:stCondLst>
-                      <p:childTnLst>
-                        <p:par>
-                          <p:cTn id="19" fill="hold">
-                            <p:stCondLst>
-                              <p:cond delay="0"/>
-                            </p:stCondLst>
-                            <p:childTnLst>
-                              <p:par>
-                                <p:cTn id="20" presetID="22" presetClass="entr" presetSubtype="8" fill="hold" grpId="0" nodeType="clickEffect">
-                                  <p:stCondLst>
-                                    <p:cond delay="0"/>
-                                  </p:stCondLst>
-                                  <p:childTnLst>
-                                    <p:set>
-                                      <p:cBhvr>
-                                        <p:cTn id="21" dur="1" fill="hold">
-                                          <p:stCondLst>
-                                            <p:cond delay="0"/>
-                                          </p:stCondLst>
-                                        </p:cTn>
-                                        <p:tgtEl>
-                                          <p:spTgt spid="3">
-                                            <p:txEl>
-                                              <p:pRg st="3" end="3"/>
-                                            </p:txEl>
-                                          </p:spTgt>
-                                        </p:tgtEl>
-                                        <p:attrNameLst>
-                                          <p:attrName>style.visibility</p:attrName>
-                                        </p:attrNameLst>
-                                      </p:cBhvr>
-                                      <p:to>
-                                        <p:strVal val="visible"/>
-                                      </p:to>
-                                    </p:set>
-                                    <p:animEffect transition="in" filter="wipe(left)">
-                                      <p:cBhvr>
-                                        <p:cTn id="22" dur="2500"/>
-                                        <p:tgtEl>
-                                          <p:spTgt spid="3">
-                                            <p:txEl>
-                                              <p:pRg st="3" end="3"/>
-                                            </p:txEl>
-                                          </p:spTgt>
-                                        </p:tgtEl>
-                                      </p:cBhvr>
-                                    </p:animEffect>
-                                  </p:childTnLst>
-                                </p:cTn>
-                              </p:par>
-                            </p:childTnLst>
-                          </p:cTn>
-                        </p:par>
-                      </p:childTnLst>
-                    </p:cTn>
-                  </p:par>
-                  <p:par>
-                    <p:cTn id="23" fill="hold">
-                      <p:stCondLst>
-                        <p:cond delay="indefinite"/>
-                      </p:stCondLst>
-                      <p:childTnLst>
-                        <p:par>
-                          <p:cTn id="24" fill="hold">
-                            <p:stCondLst>
-                              <p:cond delay="0"/>
-                            </p:stCondLst>
-                            <p:childTnLst>
-                              <p:par>
-                                <p:cTn id="25" presetID="22" presetClass="entr" presetSubtype="8" fill="hold" grpId="0" nodeType="clickEffect">
-                                  <p:stCondLst>
-                                    <p:cond delay="0"/>
-                                  </p:stCondLst>
-                                  <p:childTnLst>
-                                    <p:set>
-                                      <p:cBhvr>
-                                        <p:cTn id="26" dur="1" fill="hold">
-                                          <p:stCondLst>
-                                            <p:cond delay="0"/>
-                                          </p:stCondLst>
-                                        </p:cTn>
-                                        <p:tgtEl>
-                                          <p:spTgt spid="3">
-                                            <p:txEl>
-                                              <p:pRg st="4" end="4"/>
-                                            </p:txEl>
-                                          </p:spTgt>
-                                        </p:tgtEl>
-                                        <p:attrNameLst>
-                                          <p:attrName>style.visibility</p:attrName>
-                                        </p:attrNameLst>
-                                      </p:cBhvr>
-                                      <p:to>
-                                        <p:strVal val="visible"/>
-                                      </p:to>
-                                    </p:set>
-                                    <p:animEffect transition="in" filter="wipe(left)">
-                                      <p:cBhvr>
-                                        <p:cTn id="27" dur="2500"/>
-                                        <p:tgtEl>
-                                          <p:spTgt spid="3">
-                                            <p:txEl>
-                                              <p:pRg st="4" end="4"/>
-                                            </p:txEl>
-                                          </p:spTgt>
-                                        </p:tgtEl>
-                                      </p:cBhvr>
-                                    </p:animEffect>
-                                  </p:childTnLst>
-                                </p:cTn>
-                              </p:par>
-                            </p:childTnLst>
-                          </p:cTn>
-                        </p:par>
-                      </p:childTnLst>
-                    </p:cTn>
-                  </p:par>
-                </p:childTnLst>
-              </p:cTn>
-              <p:prevCondLst>
-                <p:cond evt="onPrev" delay="0">
-                  <p:tgtEl>
-                    <p:sldTgt/>
-                  </p:tgtEl>
-                </p:cond>
-              </p:prevCondLst>
-              <p:nextCondLst>
-                <p:cond evt="onNext" delay="0">
-                  <p:tgtEl>
-                    <p:sldTgt/>
-                  </p:tgtEl>
-                </p:cond>
-              </p:nextCondLst>
-            </p:seq>
-          </p:childTnLst>
-        </p:cTn>
-      </p:par>
-    </p:tnLst>
-    <p:bldLst>
-      <p:bldP spid="3" grpId="0" uiExpand="1" build="p"/>
-    </p:bldLst>
-  </p:timing>
 </p:sld>
 </file>
 

--- a/s1/S1 CS Slides.pptx
+++ b/s1/S1 CS Slides.pptx
@@ -5,7 +5,7 @@
     <p:sldMasterId id="2147483648" r:id="rId1"/>
   </p:sldMasterIdLst>
   <p:notesMasterIdLst>
-    <p:notesMasterId r:id="rId14"/>
+    <p:notesMasterId r:id="rId15"/>
   </p:notesMasterIdLst>
   <p:sldIdLst>
     <p:sldId id="262" r:id="rId2"/>
@@ -15,11 +15,12 @@
     <p:sldId id="265" r:id="rId6"/>
     <p:sldId id="267" r:id="rId7"/>
     <p:sldId id="266" r:id="rId8"/>
-    <p:sldId id="268" r:id="rId9"/>
-    <p:sldId id="269" r:id="rId10"/>
-    <p:sldId id="272" r:id="rId11"/>
-    <p:sldId id="270" r:id="rId12"/>
-    <p:sldId id="271" r:id="rId13"/>
+    <p:sldId id="274" r:id="rId9"/>
+    <p:sldId id="268" r:id="rId10"/>
+    <p:sldId id="269" r:id="rId11"/>
+    <p:sldId id="272" r:id="rId12"/>
+    <p:sldId id="270" r:id="rId13"/>
+    <p:sldId id="271" r:id="rId14"/>
   </p:sldIdLst>
   <p:sldSz cx="12192000" cy="6858000"/>
   <p:notesSz cx="7102475" cy="10234613"/>
@@ -138,6 +139,7 @@
             <p14:sldId id="265"/>
             <p14:sldId id="267"/>
             <p14:sldId id="266"/>
+            <p14:sldId id="274"/>
             <p14:sldId id="268"/>
           </p14:sldIdLst>
         </p14:section>
@@ -257,7 +259,7 @@
           <a:p>
             <a:fld id="{0E35528A-819C-4AD3-BDC3-2CDCE7BEAF53}" type="datetimeFigureOut">
               <a:rPr lang="en-GB" smtClean="0"/>
-              <a:t>24/02/2026</a:t>
+              <a:t>13/03/2026</a:t>
             </a:fld>
             <a:endParaRPr lang="en-GB"/>
           </a:p>
@@ -984,7 +986,7 @@
           <a:p>
             <a:fld id="{B71FE5B5-A979-4370-A255-218EAB36A5F4}" type="slidenum">
               <a:rPr lang="en-GB" smtClean="0"/>
-              <a:t>8</a:t>
+              <a:t>9</a:t>
             </a:fld>
             <a:endParaRPr lang="en-GB"/>
           </a:p>
@@ -1095,7 +1097,7 @@
           <a:p>
             <a:fld id="{B71FE5B5-A979-4370-A255-218EAB36A5F4}" type="slidenum">
               <a:rPr lang="en-GB" smtClean="0"/>
-              <a:t>10</a:t>
+              <a:t>11</a:t>
             </a:fld>
             <a:endParaRPr lang="en-GB"/>
           </a:p>
@@ -1203,7 +1205,7 @@
           <a:p>
             <a:fld id="{B71FE5B5-A979-4370-A255-218EAB36A5F4}" type="slidenum">
               <a:rPr lang="en-GB" smtClean="0"/>
-              <a:t>11</a:t>
+              <a:t>12</a:t>
             </a:fld>
             <a:endParaRPr lang="en-GB"/>
           </a:p>
@@ -1311,7 +1313,7 @@
           <a:p>
             <a:fld id="{B71FE5B5-A979-4370-A255-218EAB36A5F4}" type="slidenum">
               <a:rPr lang="en-GB" smtClean="0"/>
-              <a:t>12</a:t>
+              <a:t>13</a:t>
             </a:fld>
             <a:endParaRPr lang="en-GB"/>
           </a:p>
@@ -1479,7 +1481,7 @@
           <a:p>
             <a:fld id="{CBBB66F6-7471-47DA-8EED-C7BCCA53B015}" type="datetimeFigureOut">
               <a:rPr lang="en-GB" smtClean="0"/>
-              <a:t>24/02/2026</a:t>
+              <a:t>13/03/2026</a:t>
             </a:fld>
             <a:endParaRPr lang="en-GB"/>
           </a:p>
@@ -1695,7 +1697,7 @@
           <a:p>
             <a:fld id="{CBBB66F6-7471-47DA-8EED-C7BCCA53B015}" type="datetimeFigureOut">
               <a:rPr lang="en-GB" smtClean="0"/>
-              <a:t>24/02/2026</a:t>
+              <a:t>13/03/2026</a:t>
             </a:fld>
             <a:endParaRPr lang="en-GB"/>
           </a:p>
@@ -1905,7 +1907,7 @@
           <a:p>
             <a:fld id="{CBBB66F6-7471-47DA-8EED-C7BCCA53B015}" type="datetimeFigureOut">
               <a:rPr lang="en-GB" smtClean="0"/>
-              <a:t>24/02/2026</a:t>
+              <a:t>13/03/2026</a:t>
             </a:fld>
             <a:endParaRPr lang="en-GB"/>
           </a:p>
@@ -2151,7 +2153,7 @@
           <a:p>
             <a:fld id="{CBBB66F6-7471-47DA-8EED-C7BCCA53B015}" type="datetimeFigureOut">
               <a:rPr lang="en-GB" smtClean="0"/>
-              <a:t>24/02/2026</a:t>
+              <a:t>13/03/2026</a:t>
             </a:fld>
             <a:endParaRPr lang="en-GB"/>
           </a:p>
@@ -2443,7 +2445,7 @@
           <a:p>
             <a:fld id="{CBBB66F6-7471-47DA-8EED-C7BCCA53B015}" type="datetimeFigureOut">
               <a:rPr lang="en-GB" smtClean="0"/>
-              <a:t>24/02/2026</a:t>
+              <a:t>13/03/2026</a:t>
             </a:fld>
             <a:endParaRPr lang="en-GB"/>
           </a:p>
@@ -2803,7 +2805,7 @@
           <a:p>
             <a:fld id="{CBBB66F6-7471-47DA-8EED-C7BCCA53B015}" type="datetimeFigureOut">
               <a:rPr lang="en-GB" smtClean="0"/>
-              <a:t>24/02/2026</a:t>
+              <a:t>13/03/2026</a:t>
             </a:fld>
             <a:endParaRPr lang="en-GB"/>
           </a:p>
@@ -3310,7 +3312,7 @@
           <a:p>
             <a:fld id="{CBBB66F6-7471-47DA-8EED-C7BCCA53B015}" type="datetimeFigureOut">
               <a:rPr lang="en-GB" smtClean="0"/>
-              <a:t>24/02/2026</a:t>
+              <a:t>13/03/2026</a:t>
             </a:fld>
             <a:endParaRPr lang="en-GB"/>
           </a:p>
@@ -3468,7 +3470,7 @@
           <a:p>
             <a:fld id="{CBBB66F6-7471-47DA-8EED-C7BCCA53B015}" type="datetimeFigureOut">
               <a:rPr lang="en-GB" smtClean="0"/>
-              <a:t>24/02/2026</a:t>
+              <a:t>13/03/2026</a:t>
             </a:fld>
             <a:endParaRPr lang="en-GB"/>
           </a:p>
@@ -3597,7 +3599,7 @@
           <a:p>
             <a:fld id="{CBBB66F6-7471-47DA-8EED-C7BCCA53B015}" type="datetimeFigureOut">
               <a:rPr lang="en-GB" smtClean="0"/>
-              <a:t>24/02/2026</a:t>
+              <a:t>13/03/2026</a:t>
             </a:fld>
             <a:endParaRPr lang="en-GB"/>
           </a:p>
@@ -3940,7 +3942,7 @@
           <a:p>
             <a:fld id="{CBBB66F6-7471-47DA-8EED-C7BCCA53B015}" type="datetimeFigureOut">
               <a:rPr lang="en-GB" smtClean="0"/>
-              <a:t>24/02/2026</a:t>
+              <a:t>13/03/2026</a:t>
             </a:fld>
             <a:endParaRPr lang="en-GB"/>
           </a:p>
@@ -4229,7 +4231,7 @@
           <a:p>
             <a:fld id="{CBBB66F6-7471-47DA-8EED-C7BCCA53B015}" type="datetimeFigureOut">
               <a:rPr lang="en-GB" smtClean="0"/>
-              <a:t>24/02/2026</a:t>
+              <a:t>13/03/2026</a:t>
             </a:fld>
             <a:endParaRPr lang="en-GB"/>
           </a:p>
@@ -4476,7 +4478,7 @@
           <a:p>
             <a:fld id="{CBBB66F6-7471-47DA-8EED-C7BCCA53B015}" type="datetimeFigureOut">
               <a:rPr lang="en-GB" noProof="0" smtClean="0"/>
-              <a:t>24/02/2026</a:t>
+              <a:t>13/03/2026</a:t>
             </a:fld>
             <a:endParaRPr lang="en-GB" noProof="0" dirty="0"/>
           </a:p>
@@ -4964,6 +4966,95 @@
 </file>
 
 <file path=ppt/slides/slide10.xml><?xml version="1.0" encoding="utf-8"?>
+<p:sld xmlns:a="http://schemas.openxmlformats.org/drawingml/2006/main" xmlns:r="http://schemas.openxmlformats.org/officeDocument/2006/relationships" xmlns:p="http://schemas.openxmlformats.org/presentationml/2006/main">
+  <p:cSld>
+    <p:spTree>
+      <p:nvGrpSpPr>
+        <p:cNvPr id="1" name="">
+          <a:extLst>
+            <a:ext uri="{FF2B5EF4-FFF2-40B4-BE49-F238E27FC236}">
+              <a16:creationId xmlns:a16="http://schemas.microsoft.com/office/drawing/2014/main" id="{1853FA91-EE48-6F0E-5082-7026C9049E35}"/>
+            </a:ext>
+          </a:extLst>
+        </p:cNvPr>
+        <p:cNvGrpSpPr/>
+        <p:nvPr/>
+      </p:nvGrpSpPr>
+      <p:grpSpPr>
+        <a:xfrm>
+          <a:off x="0" y="0"/>
+          <a:ext cx="0" cy="0"/>
+          <a:chOff x="0" y="0"/>
+          <a:chExt cx="0" cy="0"/>
+        </a:xfrm>
+      </p:grpSpPr>
+      <p:sp>
+        <p:nvSpPr>
+          <p:cNvPr id="2" name="Title 1">
+            <a:extLst>
+              <a:ext uri="{FF2B5EF4-FFF2-40B4-BE49-F238E27FC236}">
+                <a16:creationId xmlns:a16="http://schemas.microsoft.com/office/drawing/2014/main" id="{A980DD91-1F9B-0C93-DB8C-02887CB20F6F}"/>
+              </a:ext>
+            </a:extLst>
+          </p:cNvPr>
+          <p:cNvSpPr>
+            <a:spLocks noGrp="1"/>
+          </p:cNvSpPr>
+          <p:nvPr>
+            <p:ph type="title"/>
+          </p:nvPr>
+        </p:nvSpPr>
+        <p:spPr/>
+        <p:txBody>
+          <a:bodyPr/>
+          <a:lstStyle/>
+          <a:p>
+            <a:r>
+              <a:rPr lang="en-GB" dirty="0"/>
+              <a:t>iDEA Award</a:t>
+            </a:r>
+          </a:p>
+        </p:txBody>
+      </p:sp>
+      <p:sp>
+        <p:nvSpPr>
+          <p:cNvPr id="3" name="Text Placeholder 2">
+            <a:extLst>
+              <a:ext uri="{FF2B5EF4-FFF2-40B4-BE49-F238E27FC236}">
+                <a16:creationId xmlns:a16="http://schemas.microsoft.com/office/drawing/2014/main" id="{1EF1230C-BA39-55DA-3DF8-B5AED8DE76AC}"/>
+              </a:ext>
+            </a:extLst>
+          </p:cNvPr>
+          <p:cNvSpPr>
+            <a:spLocks noGrp="1"/>
+          </p:cNvSpPr>
+          <p:nvPr>
+            <p:ph type="body" idx="1"/>
+          </p:nvPr>
+        </p:nvSpPr>
+        <p:spPr/>
+        <p:txBody>
+          <a:bodyPr/>
+          <a:lstStyle/>
+          <a:p>
+            <a:endParaRPr lang="en-GB"/>
+          </a:p>
+        </p:txBody>
+      </p:sp>
+    </p:spTree>
+    <p:extLst>
+      <p:ext uri="{BB962C8B-B14F-4D97-AF65-F5344CB8AC3E}">
+        <p14:creationId xmlns:p14="http://schemas.microsoft.com/office/powerpoint/2010/main" val="3410765061"/>
+      </p:ext>
+    </p:extLst>
+  </p:cSld>
+  <p:clrMapOvr>
+    <a:masterClrMapping/>
+  </p:clrMapOvr>
+</p:sld>
+</file>
+
+<file path=ppt/slides/slide11.xml><?xml version="1.0" encoding="utf-8"?>
 <p:sld xmlns:a="http://schemas.openxmlformats.org/drawingml/2006/main" xmlns:r="http://schemas.openxmlformats.org/officeDocument/2006/relationships" xmlns:p="http://schemas.openxmlformats.org/presentationml/2006/main">
   <p:cSld>
     <p:spTree>
@@ -5463,7 +5554,7 @@
 </p:sld>
 </file>
 
-<file path=ppt/slides/slide11.xml><?xml version="1.0" encoding="utf-8"?>
+<file path=ppt/slides/slide12.xml><?xml version="1.0" encoding="utf-8"?>
 <p:sld xmlns:a="http://schemas.openxmlformats.org/drawingml/2006/main" xmlns:r="http://schemas.openxmlformats.org/officeDocument/2006/relationships" xmlns:p="http://schemas.openxmlformats.org/presentationml/2006/main">
   <p:cSld>
     <p:spTree>
@@ -5976,7 +6067,7 @@
 </p:sld>
 </file>
 
-<file path=ppt/slides/slide12.xml><?xml version="1.0" encoding="utf-8"?>
+<file path=ppt/slides/slide13.xml><?xml version="1.0" encoding="utf-8"?>
 <p:sld xmlns:a="http://schemas.openxmlformats.org/drawingml/2006/main" xmlns:r="http://schemas.openxmlformats.org/officeDocument/2006/relationships" xmlns:p="http://schemas.openxmlformats.org/presentationml/2006/main">
   <p:cSld>
     <p:spTree>
@@ -8879,7 +8970,7 @@
         <p:spPr/>
         <p:txBody>
           <a:bodyPr>
-            <a:normAutofit lnSpcReduction="10000"/>
+            <a:normAutofit/>
           </a:bodyPr>
           <a:lstStyle/>
           <a:p>
@@ -8902,19 +8993,6 @@
           </a:p>
           <a:p>
             <a:r>
-              <a:rPr lang="en-GB" dirty="0" err="1"/>
-              <a:t>QRV</a:t>
-            </a:r>
-            <a:endParaRPr lang="en-GB" dirty="0"/>
-          </a:p>
-          <a:p>
-            <a:r>
-              <a:rPr lang="en-GB" dirty="0"/>
-              <a:t>ZEV</a:t>
-            </a:r>
-          </a:p>
-          <a:p>
-            <a:r>
               <a:rPr lang="en-GB" dirty="0"/>
               <a:t>Battle Code (</a:t>
             </a:r>
@@ -8943,7 +9021,7 @@
         </p:nvSpPr>
         <p:spPr>
           <a:xfrm>
-            <a:off x="1769527" y="2483856"/>
+            <a:off x="1786461" y="2589744"/>
             <a:ext cx="3034805" cy="584775"/>
           </a:xfrm>
           <a:prstGeom prst="rect">
@@ -8978,7 +9056,7 @@
         </p:nvSpPr>
         <p:spPr>
           <a:xfrm>
-            <a:off x="1786461" y="3209300"/>
+            <a:off x="1786461" y="3353863"/>
             <a:ext cx="2862066" cy="584775"/>
           </a:xfrm>
           <a:prstGeom prst="rect">
@@ -8999,76 +9077,6 @@
             <a:r>
               <a:rPr lang="en-GB" sz="3200" i="1" dirty="0"/>
               <a:t>Save Our Souls</a:t>
-            </a:r>
-          </a:p>
-        </p:txBody>
-      </p:sp>
-      <p:sp>
-        <p:nvSpPr>
-          <p:cNvPr id="6" name="TextBox 5">
-            <a:extLst>
-              <a:ext uri="{FF2B5EF4-FFF2-40B4-BE49-F238E27FC236}">
-                <a16:creationId xmlns:a16="http://schemas.microsoft.com/office/drawing/2014/main" id="{0108A4E6-8FF3-4DB4-82A4-A00897415129}"/>
-              </a:ext>
-            </a:extLst>
-          </p:cNvPr>
-          <p:cNvSpPr txBox="1"/>
-          <p:nvPr/>
-        </p:nvSpPr>
-        <p:spPr>
-          <a:xfrm>
-            <a:off x="1880968" y="3929012"/>
-            <a:ext cx="4340099" cy="584775"/>
-          </a:xfrm>
-          <a:prstGeom prst="rect">
-            <a:avLst/>
-          </a:prstGeom>
-          <a:noFill/>
-        </p:spPr>
-        <p:txBody>
-          <a:bodyPr wrap="none" rtlCol="0">
-            <a:spAutoFit/>
-          </a:bodyPr>
-          <a:lstStyle/>
-          <a:p>
-            <a:r>
-              <a:rPr lang="en-GB" sz="3200" dirty="0"/>
-              <a:t>- Q Code: Are you ready?</a:t>
-            </a:r>
-          </a:p>
-        </p:txBody>
-      </p:sp>
-      <p:sp>
-        <p:nvSpPr>
-          <p:cNvPr id="7" name="TextBox 6">
-            <a:extLst>
-              <a:ext uri="{FF2B5EF4-FFF2-40B4-BE49-F238E27FC236}">
-                <a16:creationId xmlns:a16="http://schemas.microsoft.com/office/drawing/2014/main" id="{CC729A72-7625-419B-9E11-298F9F0BAE02}"/>
-              </a:ext>
-            </a:extLst>
-          </p:cNvPr>
-          <p:cNvSpPr txBox="1"/>
-          <p:nvPr/>
-        </p:nvSpPr>
-        <p:spPr>
-          <a:xfrm>
-            <a:off x="1771221" y="4648724"/>
-            <a:ext cx="7623177" cy="584775"/>
-          </a:xfrm>
-          <a:prstGeom prst="rect">
-            <a:avLst/>
-          </a:prstGeom>
-          <a:noFill/>
-        </p:spPr>
-        <p:txBody>
-          <a:bodyPr wrap="none" rtlCol="0">
-            <a:spAutoFit/>
-          </a:bodyPr>
-          <a:lstStyle/>
-          <a:p>
-            <a:r>
-              <a:rPr lang="en-GB" sz="3200" dirty="0"/>
-              <a:t>- Z Code: Request you acknowledge message</a:t>
             </a:r>
           </a:p>
         </p:txBody>
@@ -9422,239 +9430,11 @@
                                     </p:set>
                                     <p:animEffect transition="in" filter="wipe(left)">
                                       <p:cBhvr>
-                                        <p:cTn id="32" dur="1000"/>
+                                        <p:cTn id="32" dur="1500"/>
                                         <p:tgtEl>
                                           <p:spTgt spid="3">
                                             <p:txEl>
                                               <p:pRg st="3" end="3"/>
-                                            </p:txEl>
-                                          </p:spTgt>
-                                        </p:tgtEl>
-                                      </p:cBhvr>
-                                    </p:animEffect>
-                                  </p:childTnLst>
-                                </p:cTn>
-                              </p:par>
-                            </p:childTnLst>
-                          </p:cTn>
-                        </p:par>
-                      </p:childTnLst>
-                    </p:cTn>
-                  </p:par>
-                  <p:par>
-                    <p:cTn id="33" fill="hold">
-                      <p:stCondLst>
-                        <p:cond delay="indefinite"/>
-                      </p:stCondLst>
-                      <p:childTnLst>
-                        <p:par>
-                          <p:cTn id="34" fill="hold">
-                            <p:stCondLst>
-                              <p:cond delay="0"/>
-                            </p:stCondLst>
-                            <p:childTnLst>
-                              <p:par>
-                                <p:cTn id="35" presetID="22" presetClass="entr" presetSubtype="8" fill="hold" grpId="0" nodeType="clickEffect">
-                                  <p:stCondLst>
-                                    <p:cond delay="0"/>
-                                  </p:stCondLst>
-                                  <p:childTnLst>
-                                    <p:set>
-                                      <p:cBhvr>
-                                        <p:cTn id="36" dur="1" fill="hold">
-                                          <p:stCondLst>
-                                            <p:cond delay="0"/>
-                                          </p:stCondLst>
-                                        </p:cTn>
-                                        <p:tgtEl>
-                                          <p:spTgt spid="6"/>
-                                        </p:tgtEl>
-                                        <p:attrNameLst>
-                                          <p:attrName>style.visibility</p:attrName>
-                                        </p:attrNameLst>
-                                      </p:cBhvr>
-                                      <p:to>
-                                        <p:strVal val="visible"/>
-                                      </p:to>
-                                    </p:set>
-                                    <p:animEffect transition="in" filter="wipe(left)">
-                                      <p:cBhvr>
-                                        <p:cTn id="37" dur="1500"/>
-                                        <p:tgtEl>
-                                          <p:spTgt spid="6"/>
-                                        </p:tgtEl>
-                                      </p:cBhvr>
-                                    </p:animEffect>
-                                  </p:childTnLst>
-                                </p:cTn>
-                              </p:par>
-                            </p:childTnLst>
-                          </p:cTn>
-                        </p:par>
-                      </p:childTnLst>
-                    </p:cTn>
-                  </p:par>
-                  <p:par>
-                    <p:cTn id="38" fill="hold">
-                      <p:stCondLst>
-                        <p:cond delay="indefinite"/>
-                      </p:stCondLst>
-                      <p:childTnLst>
-                        <p:par>
-                          <p:cTn id="39" fill="hold">
-                            <p:stCondLst>
-                              <p:cond delay="0"/>
-                            </p:stCondLst>
-                            <p:childTnLst>
-                              <p:par>
-                                <p:cTn id="40" presetID="22" presetClass="entr" presetSubtype="8" fill="hold" grpId="0" nodeType="clickEffect">
-                                  <p:stCondLst>
-                                    <p:cond delay="0"/>
-                                  </p:stCondLst>
-                                  <p:childTnLst>
-                                    <p:set>
-                                      <p:cBhvr>
-                                        <p:cTn id="41" dur="1" fill="hold">
-                                          <p:stCondLst>
-                                            <p:cond delay="0"/>
-                                          </p:stCondLst>
-                                        </p:cTn>
-                                        <p:tgtEl>
-                                          <p:spTgt spid="3">
-                                            <p:txEl>
-                                              <p:pRg st="4" end="4"/>
-                                            </p:txEl>
-                                          </p:spTgt>
-                                        </p:tgtEl>
-                                        <p:attrNameLst>
-                                          <p:attrName>style.visibility</p:attrName>
-                                        </p:attrNameLst>
-                                      </p:cBhvr>
-                                      <p:to>
-                                        <p:strVal val="visible"/>
-                                      </p:to>
-                                    </p:set>
-                                    <p:animEffect transition="in" filter="wipe(left)">
-                                      <p:cBhvr>
-                                        <p:cTn id="42" dur="1000"/>
-                                        <p:tgtEl>
-                                          <p:spTgt spid="3">
-                                            <p:txEl>
-                                              <p:pRg st="4" end="4"/>
-                                            </p:txEl>
-                                          </p:spTgt>
-                                        </p:tgtEl>
-                                      </p:cBhvr>
-                                    </p:animEffect>
-                                  </p:childTnLst>
-                                </p:cTn>
-                              </p:par>
-                            </p:childTnLst>
-                          </p:cTn>
-                        </p:par>
-                      </p:childTnLst>
-                    </p:cTn>
-                  </p:par>
-                  <p:par>
-                    <p:cTn id="43" fill="hold">
-                      <p:stCondLst>
-                        <p:cond delay="indefinite"/>
-                      </p:stCondLst>
-                      <p:childTnLst>
-                        <p:par>
-                          <p:cTn id="44" fill="hold">
-                            <p:stCondLst>
-                              <p:cond delay="0"/>
-                            </p:stCondLst>
-                            <p:childTnLst>
-                              <p:par>
-                                <p:cTn id="45" presetID="22" presetClass="entr" presetSubtype="8" fill="hold" grpId="0" nodeType="clickEffect">
-                                  <p:stCondLst>
-                                    <p:cond delay="0"/>
-                                  </p:stCondLst>
-                                  <p:childTnLst>
-                                    <p:set>
-                                      <p:cBhvr>
-                                        <p:cTn id="46" dur="1" fill="hold">
-                                          <p:stCondLst>
-                                            <p:cond delay="0"/>
-                                          </p:stCondLst>
-                                        </p:cTn>
-                                        <p:tgtEl>
-                                          <p:spTgt spid="7"/>
-                                        </p:tgtEl>
-                                        <p:attrNameLst>
-                                          <p:attrName>style.visibility</p:attrName>
-                                        </p:attrNameLst>
-                                      </p:cBhvr>
-                                      <p:to>
-                                        <p:strVal val="visible"/>
-                                      </p:to>
-                                    </p:set>
-                                    <p:animEffect transition="in" filter="wipe(left)">
-                                      <p:cBhvr>
-                                        <p:cTn id="47" dur="2000"/>
-                                        <p:tgtEl>
-                                          <p:spTgt spid="7"/>
-                                        </p:tgtEl>
-                                      </p:cBhvr>
-                                    </p:animEffect>
-                                  </p:childTnLst>
-                                </p:cTn>
-                              </p:par>
-                            </p:childTnLst>
-                          </p:cTn>
-                        </p:par>
-                      </p:childTnLst>
-                    </p:cTn>
-                  </p:par>
-                  <p:par>
-                    <p:cTn id="48" fill="hold">
-                      <p:stCondLst>
-                        <p:cond delay="indefinite"/>
-                      </p:stCondLst>
-                      <p:childTnLst>
-                        <p:par>
-                          <p:cTn id="49" fill="hold">
-                            <p:stCondLst>
-                              <p:cond delay="0"/>
-                            </p:stCondLst>
-                            <p:childTnLst>
-                              <p:par>
-                                <p:cTn id="50" presetID="22" presetClass="entr" presetSubtype="8" fill="hold" grpId="0" nodeType="clickEffect">
-                                  <p:stCondLst>
-                                    <p:cond delay="0"/>
-                                  </p:stCondLst>
-                                  <p:childTnLst>
-                                    <p:set>
-                                      <p:cBhvr>
-                                        <p:cTn id="51" dur="1" fill="hold">
-                                          <p:stCondLst>
-                                            <p:cond delay="0"/>
-                                          </p:stCondLst>
-                                        </p:cTn>
-                                        <p:tgtEl>
-                                          <p:spTgt spid="3">
-                                            <p:txEl>
-                                              <p:pRg st="5" end="5"/>
-                                            </p:txEl>
-                                          </p:spTgt>
-                                        </p:tgtEl>
-                                        <p:attrNameLst>
-                                          <p:attrName>style.visibility</p:attrName>
-                                        </p:attrNameLst>
-                                      </p:cBhvr>
-                                      <p:to>
-                                        <p:strVal val="visible"/>
-                                      </p:to>
-                                    </p:set>
-                                    <p:animEffect transition="in" filter="wipe(left)">
-                                      <p:cBhvr>
-                                        <p:cTn id="52" dur="1500"/>
-                                        <p:tgtEl>
-                                          <p:spTgt spid="3">
-                                            <p:txEl>
-                                              <p:pRg st="5" end="5"/>
                                             </p:txEl>
                                           </p:spTgt>
                                         </p:tgtEl>
@@ -9694,14 +9474,394 @@
       <p:bldP spid="3" grpId="0" uiExpand="1" build="p"/>
       <p:bldP spid="4" grpId="0"/>
       <p:bldP spid="5" grpId="0"/>
-      <p:bldP spid="6" grpId="0"/>
-      <p:bldP spid="7" grpId="0"/>
     </p:bldLst>
   </p:timing>
 </p:sld>
 </file>
 
 <file path=ppt/slides/slide8.xml><?xml version="1.0" encoding="utf-8"?>
+<p:sld xmlns:a="http://schemas.openxmlformats.org/drawingml/2006/main" xmlns:r="http://schemas.openxmlformats.org/officeDocument/2006/relationships" xmlns:p="http://schemas.openxmlformats.org/presentationml/2006/main">
+  <p:cSld>
+    <p:spTree>
+      <p:nvGrpSpPr>
+        <p:cNvPr id="1" name=""/>
+        <p:cNvGrpSpPr/>
+        <p:nvPr/>
+      </p:nvGrpSpPr>
+      <p:grpSpPr>
+        <a:xfrm>
+          <a:off x="0" y="0"/>
+          <a:ext cx="0" cy="0"/>
+          <a:chOff x="0" y="0"/>
+          <a:chExt cx="0" cy="0"/>
+        </a:xfrm>
+      </p:grpSpPr>
+      <p:sp>
+        <p:nvSpPr>
+          <p:cNvPr id="2" name="Title 1">
+            <a:extLst>
+              <a:ext uri="{FF2B5EF4-FFF2-40B4-BE49-F238E27FC236}">
+                <a16:creationId xmlns:a16="http://schemas.microsoft.com/office/drawing/2014/main" id="{54EEE604-1976-406C-A04F-FBFAA914F527}"/>
+              </a:ext>
+            </a:extLst>
+          </p:cNvPr>
+          <p:cNvSpPr>
+            <a:spLocks noGrp="1"/>
+          </p:cNvSpPr>
+          <p:nvPr>
+            <p:ph type="title"/>
+          </p:nvPr>
+        </p:nvSpPr>
+        <p:spPr/>
+        <p:txBody>
+          <a:bodyPr/>
+          <a:lstStyle/>
+          <a:p>
+            <a:r>
+              <a:rPr lang="en-GB" dirty="0"/>
+              <a:t>Create Brevity Codes</a:t>
+            </a:r>
+          </a:p>
+        </p:txBody>
+      </p:sp>
+      <p:graphicFrame>
+        <p:nvGraphicFramePr>
+          <p:cNvPr id="4" name="Content Placeholder 3">
+            <a:extLst>
+              <a:ext uri="{FF2B5EF4-FFF2-40B4-BE49-F238E27FC236}">
+                <a16:creationId xmlns:a16="http://schemas.microsoft.com/office/drawing/2014/main" id="{3D4B1506-3798-43B8-9555-6B74BDCFEF8E}"/>
+              </a:ext>
+            </a:extLst>
+          </p:cNvPr>
+          <p:cNvGraphicFramePr>
+            <a:graphicFrameLocks noGrp="1"/>
+          </p:cNvGraphicFramePr>
+          <p:nvPr>
+            <p:ph idx="1"/>
+            <p:extLst>
+              <p:ext uri="{D42A27DB-BD31-4B8C-83A1-F6EECF244321}">
+                <p14:modId xmlns:p14="http://schemas.microsoft.com/office/powerpoint/2010/main" val="2361157210"/>
+              </p:ext>
+            </p:extLst>
+          </p:nvPr>
+        </p:nvGraphicFramePr>
+        <p:xfrm>
+          <a:off x="838200" y="1825625"/>
+          <a:ext cx="10515600" cy="4632960"/>
+        </p:xfrm>
+        <a:graphic>
+          <a:graphicData uri="http://schemas.openxmlformats.org/drawingml/2006/table">
+            <a:tbl>
+              <a:tblPr firstRow="1" bandRow="1">
+                <a:tableStyleId>{5C22544A-7EE6-4342-B048-85BDC9FD1C3A}</a:tableStyleId>
+              </a:tblPr>
+              <a:tblGrid>
+                <a:gridCol w="2510642">
+                  <a:extLst>
+                    <a:ext uri="{9D8B030D-6E8A-4147-A177-3AD203B41FA5}">
+                      <a16:colId xmlns:a16="http://schemas.microsoft.com/office/drawing/2014/main" val="951556185"/>
+                    </a:ext>
+                  </a:extLst>
+                </a:gridCol>
+                <a:gridCol w="8004958">
+                  <a:extLst>
+                    <a:ext uri="{9D8B030D-6E8A-4147-A177-3AD203B41FA5}">
+                      <a16:colId xmlns:a16="http://schemas.microsoft.com/office/drawing/2014/main" val="3643050308"/>
+                    </a:ext>
+                  </a:extLst>
+                </a:gridCol>
+              </a:tblGrid>
+              <a:tr h="370840">
+                <a:tc>
+                  <a:txBody>
+                    <a:bodyPr/>
+                    <a:lstStyle/>
+                    <a:p>
+                      <a:r>
+                        <a:rPr lang="en-GB" sz="3200" dirty="0"/>
+                        <a:t>Code</a:t>
+                      </a:r>
+                    </a:p>
+                  </a:txBody>
+                  <a:tcPr/>
+                </a:tc>
+                <a:tc>
+                  <a:txBody>
+                    <a:bodyPr/>
+                    <a:lstStyle/>
+                    <a:p>
+                      <a:r>
+                        <a:rPr lang="en-GB" sz="3200" dirty="0"/>
+                        <a:t>Meaning</a:t>
+                      </a:r>
+                    </a:p>
+                  </a:txBody>
+                  <a:tcPr/>
+                </a:tc>
+                <a:extLst>
+                  <a:ext uri="{0D108BD9-81ED-4DB2-BD59-A6C34878D82A}">
+                    <a16:rowId xmlns:a16="http://schemas.microsoft.com/office/drawing/2014/main" val="1465954262"/>
+                  </a:ext>
+                </a:extLst>
+              </a:tr>
+              <a:tr h="370840">
+                <a:tc>
+                  <a:txBody>
+                    <a:bodyPr/>
+                    <a:lstStyle/>
+                    <a:p>
+                      <a:r>
+                        <a:rPr lang="en-GB" sz="3200" dirty="0"/>
+                        <a:t>KEE</a:t>
+                      </a:r>
+                    </a:p>
+                  </a:txBody>
+                  <a:tcPr/>
+                </a:tc>
+                <a:tc>
+                  <a:txBody>
+                    <a:bodyPr/>
+                    <a:lstStyle/>
+                    <a:p>
+                      <a:r>
+                        <a:rPr lang="en-GB" sz="3200" dirty="0"/>
+                        <a:t>How are you?</a:t>
+                      </a:r>
+                    </a:p>
+                  </a:txBody>
+                  <a:tcPr/>
+                </a:tc>
+                <a:extLst>
+                  <a:ext uri="{0D108BD9-81ED-4DB2-BD59-A6C34878D82A}">
+                    <a16:rowId xmlns:a16="http://schemas.microsoft.com/office/drawing/2014/main" val="2033088753"/>
+                  </a:ext>
+                </a:extLst>
+              </a:tr>
+              <a:tr h="370840">
+                <a:tc>
+                  <a:txBody>
+                    <a:bodyPr/>
+                    <a:lstStyle/>
+                    <a:p>
+                      <a:r>
+                        <a:rPr lang="en-GB" sz="3200" dirty="0" err="1"/>
+                        <a:t>KAA</a:t>
+                      </a:r>
+                      <a:endParaRPr lang="en-GB" sz="3200" dirty="0"/>
+                    </a:p>
+                  </a:txBody>
+                  <a:tcPr/>
+                </a:tc>
+                <a:tc>
+                  <a:txBody>
+                    <a:bodyPr/>
+                    <a:lstStyle/>
+                    <a:p>
+                      <a:r>
+                        <a:rPr lang="en-GB" sz="3200" dirty="0"/>
+                        <a:t>Good</a:t>
+                      </a:r>
+                    </a:p>
+                  </a:txBody>
+                  <a:tcPr/>
+                </a:tc>
+                <a:extLst>
+                  <a:ext uri="{0D108BD9-81ED-4DB2-BD59-A6C34878D82A}">
+                    <a16:rowId xmlns:a16="http://schemas.microsoft.com/office/drawing/2014/main" val="2904072805"/>
+                  </a:ext>
+                </a:extLst>
+              </a:tr>
+              <a:tr h="370840">
+                <a:tc>
+                  <a:txBody>
+                    <a:bodyPr/>
+                    <a:lstStyle/>
+                    <a:p>
+                      <a:r>
+                        <a:rPr lang="en-GB" sz="3200" dirty="0" err="1"/>
+                        <a:t>KAB</a:t>
+                      </a:r>
+                      <a:endParaRPr lang="en-GB" sz="3200" dirty="0"/>
+                    </a:p>
+                  </a:txBody>
+                  <a:tcPr/>
+                </a:tc>
+                <a:tc>
+                  <a:txBody>
+                    <a:bodyPr/>
+                    <a:lstStyle/>
+                    <a:p>
+                      <a:r>
+                        <a:rPr lang="en-GB" sz="3200" dirty="0"/>
+                        <a:t>Bad</a:t>
+                      </a:r>
+                    </a:p>
+                  </a:txBody>
+                  <a:tcPr/>
+                </a:tc>
+                <a:extLst>
+                  <a:ext uri="{0D108BD9-81ED-4DB2-BD59-A6C34878D82A}">
+                    <a16:rowId xmlns:a16="http://schemas.microsoft.com/office/drawing/2014/main" val="1196964872"/>
+                  </a:ext>
+                </a:extLst>
+              </a:tr>
+              <a:tr h="370840">
+                <a:tc>
+                  <a:txBody>
+                    <a:bodyPr/>
+                    <a:lstStyle/>
+                    <a:p>
+                      <a:endParaRPr lang="en-GB" sz="3200" dirty="0"/>
+                    </a:p>
+                  </a:txBody>
+                  <a:tcPr/>
+                </a:tc>
+                <a:tc>
+                  <a:txBody>
+                    <a:bodyPr/>
+                    <a:lstStyle/>
+                    <a:p>
+                      <a:endParaRPr lang="en-GB" sz="3200" dirty="0"/>
+                    </a:p>
+                  </a:txBody>
+                  <a:tcPr/>
+                </a:tc>
+                <a:extLst>
+                  <a:ext uri="{0D108BD9-81ED-4DB2-BD59-A6C34878D82A}">
+                    <a16:rowId xmlns:a16="http://schemas.microsoft.com/office/drawing/2014/main" val="3854207709"/>
+                  </a:ext>
+                </a:extLst>
+              </a:tr>
+              <a:tr h="370840">
+                <a:tc>
+                  <a:txBody>
+                    <a:bodyPr/>
+                    <a:lstStyle/>
+                    <a:p>
+                      <a:r>
+                        <a:rPr lang="en-GB" sz="3200" dirty="0" err="1"/>
+                        <a:t>KTC</a:t>
+                      </a:r>
+                      <a:endParaRPr lang="en-GB" sz="3200" dirty="0"/>
+                    </a:p>
+                  </a:txBody>
+                  <a:tcPr/>
+                </a:tc>
+                <a:tc>
+                  <a:txBody>
+                    <a:bodyPr/>
+                    <a:lstStyle/>
+                    <a:p>
+                      <a:pPr marL="0" marR="0" lvl="0" indent="0" algn="l" defTabSz="914400" rtl="0" eaLnBrk="1" fontAlgn="auto" latinLnBrk="0" hangingPunct="1">
+                        <a:lnSpc>
+                          <a:spcPct val="100000"/>
+                        </a:lnSpc>
+                        <a:spcBef>
+                          <a:spcPts val="0"/>
+                        </a:spcBef>
+                        <a:spcAft>
+                          <a:spcPts val="0"/>
+                        </a:spcAft>
+                        <a:buClrTx/>
+                        <a:buSzTx/>
+                        <a:buFontTx/>
+                        <a:buNone/>
+                        <a:tabLst/>
+                        <a:defRPr/>
+                      </a:pPr>
+                      <a:r>
+                        <a:rPr lang="en-GB" sz="3200" dirty="0"/>
+                        <a:t>Meet me at …</a:t>
+                      </a:r>
+                    </a:p>
+                  </a:txBody>
+                  <a:tcPr/>
+                </a:tc>
+                <a:extLst>
+                  <a:ext uri="{0D108BD9-81ED-4DB2-BD59-A6C34878D82A}">
+                    <a16:rowId xmlns:a16="http://schemas.microsoft.com/office/drawing/2014/main" val="2559922084"/>
+                  </a:ext>
+                </a:extLst>
+              </a:tr>
+              <a:tr h="370840">
+                <a:tc>
+                  <a:txBody>
+                    <a:bodyPr/>
+                    <a:lstStyle/>
+                    <a:p>
+                      <a:r>
+                        <a:rPr lang="en-GB" sz="3200" dirty="0" err="1"/>
+                        <a:t>KXV</a:t>
+                      </a:r>
+                      <a:endParaRPr lang="en-GB" sz="3200" dirty="0"/>
+                    </a:p>
+                  </a:txBody>
+                  <a:tcPr/>
+                </a:tc>
+                <a:tc>
+                  <a:txBody>
+                    <a:bodyPr/>
+                    <a:lstStyle/>
+                    <a:p>
+                      <a:r>
+                        <a:rPr lang="en-GB" sz="3200" dirty="0"/>
+                        <a:t>Foyer</a:t>
+                      </a:r>
+                    </a:p>
+                  </a:txBody>
+                  <a:tcPr/>
+                </a:tc>
+                <a:extLst>
+                  <a:ext uri="{0D108BD9-81ED-4DB2-BD59-A6C34878D82A}">
+                    <a16:rowId xmlns:a16="http://schemas.microsoft.com/office/drawing/2014/main" val="3914456283"/>
+                  </a:ext>
+                </a:extLst>
+              </a:tr>
+              <a:tr h="370840">
+                <a:tc>
+                  <a:txBody>
+                    <a:bodyPr/>
+                    <a:lstStyle/>
+                    <a:p>
+                      <a:endParaRPr lang="en-GB" sz="3200"/>
+                    </a:p>
+                  </a:txBody>
+                  <a:tcPr/>
+                </a:tc>
+                <a:tc>
+                  <a:txBody>
+                    <a:bodyPr/>
+                    <a:lstStyle/>
+                    <a:p>
+                      <a:endParaRPr lang="en-GB" sz="3200" dirty="0"/>
+                    </a:p>
+                  </a:txBody>
+                  <a:tcPr/>
+                </a:tc>
+                <a:extLst>
+                  <a:ext uri="{0D108BD9-81ED-4DB2-BD59-A6C34878D82A}">
+                    <a16:rowId xmlns:a16="http://schemas.microsoft.com/office/drawing/2014/main" val="123962870"/>
+                  </a:ext>
+                </a:extLst>
+              </a:tr>
+            </a:tbl>
+          </a:graphicData>
+        </a:graphic>
+      </p:graphicFrame>
+    </p:spTree>
+    <p:extLst>
+      <p:ext uri="{BB962C8B-B14F-4D97-AF65-F5344CB8AC3E}">
+        <p14:creationId xmlns:p14="http://schemas.microsoft.com/office/powerpoint/2010/main" val="1590160963"/>
+      </p:ext>
+    </p:extLst>
+  </p:cSld>
+  <p:clrMapOvr>
+    <a:masterClrMapping/>
+  </p:clrMapOvr>
+</p:sld>
+</file>
+
+<file path=ppt/slides/slide9.xml><?xml version="1.0" encoding="utf-8"?>
 <p:sld xmlns:a="http://schemas.openxmlformats.org/drawingml/2006/main" xmlns:r="http://schemas.openxmlformats.org/officeDocument/2006/relationships" xmlns:p="http://schemas.openxmlformats.org/presentationml/2006/main">
   <p:cSld>
     <p:spTree>
@@ -10107,7 +10267,7 @@
         </p:nvSpPr>
         <p:spPr>
           <a:xfrm>
-            <a:off x="682171" y="3116580"/>
+            <a:off x="838200" y="3116579"/>
             <a:ext cx="10827657" cy="1196340"/>
           </a:xfrm>
           <a:prstGeom prst="rect">
@@ -10401,95 +10561,6 @@
       <p:bldP spid="7" grpId="0" animBg="1"/>
     </p:bldLst>
   </p:timing>
-</p:sld>
-</file>
-
-<file path=ppt/slides/slide9.xml><?xml version="1.0" encoding="utf-8"?>
-<p:sld xmlns:a="http://schemas.openxmlformats.org/drawingml/2006/main" xmlns:r="http://schemas.openxmlformats.org/officeDocument/2006/relationships" xmlns:p="http://schemas.openxmlformats.org/presentationml/2006/main">
-  <p:cSld>
-    <p:spTree>
-      <p:nvGrpSpPr>
-        <p:cNvPr id="1" name="">
-          <a:extLst>
-            <a:ext uri="{FF2B5EF4-FFF2-40B4-BE49-F238E27FC236}">
-              <a16:creationId xmlns:a16="http://schemas.microsoft.com/office/drawing/2014/main" id="{1853FA91-EE48-6F0E-5082-7026C9049E35}"/>
-            </a:ext>
-          </a:extLst>
-        </p:cNvPr>
-        <p:cNvGrpSpPr/>
-        <p:nvPr/>
-      </p:nvGrpSpPr>
-      <p:grpSpPr>
-        <a:xfrm>
-          <a:off x="0" y="0"/>
-          <a:ext cx="0" cy="0"/>
-          <a:chOff x="0" y="0"/>
-          <a:chExt cx="0" cy="0"/>
-        </a:xfrm>
-      </p:grpSpPr>
-      <p:sp>
-        <p:nvSpPr>
-          <p:cNvPr id="2" name="Title 1">
-            <a:extLst>
-              <a:ext uri="{FF2B5EF4-FFF2-40B4-BE49-F238E27FC236}">
-                <a16:creationId xmlns:a16="http://schemas.microsoft.com/office/drawing/2014/main" id="{A980DD91-1F9B-0C93-DB8C-02887CB20F6F}"/>
-              </a:ext>
-            </a:extLst>
-          </p:cNvPr>
-          <p:cNvSpPr>
-            <a:spLocks noGrp="1"/>
-          </p:cNvSpPr>
-          <p:nvPr>
-            <p:ph type="title"/>
-          </p:nvPr>
-        </p:nvSpPr>
-        <p:spPr/>
-        <p:txBody>
-          <a:bodyPr/>
-          <a:lstStyle/>
-          <a:p>
-            <a:r>
-              <a:rPr lang="en-GB" dirty="0"/>
-              <a:t>iDEA Award</a:t>
-            </a:r>
-          </a:p>
-        </p:txBody>
-      </p:sp>
-      <p:sp>
-        <p:nvSpPr>
-          <p:cNvPr id="3" name="Text Placeholder 2">
-            <a:extLst>
-              <a:ext uri="{FF2B5EF4-FFF2-40B4-BE49-F238E27FC236}">
-                <a16:creationId xmlns:a16="http://schemas.microsoft.com/office/drawing/2014/main" id="{1EF1230C-BA39-55DA-3DF8-B5AED8DE76AC}"/>
-              </a:ext>
-            </a:extLst>
-          </p:cNvPr>
-          <p:cNvSpPr>
-            <a:spLocks noGrp="1"/>
-          </p:cNvSpPr>
-          <p:nvPr>
-            <p:ph type="body" idx="1"/>
-          </p:nvPr>
-        </p:nvSpPr>
-        <p:spPr/>
-        <p:txBody>
-          <a:bodyPr/>
-          <a:lstStyle/>
-          <a:p>
-            <a:endParaRPr lang="en-GB"/>
-          </a:p>
-        </p:txBody>
-      </p:sp>
-    </p:spTree>
-    <p:extLst>
-      <p:ext uri="{BB962C8B-B14F-4D97-AF65-F5344CB8AC3E}">
-        <p14:creationId xmlns:p14="http://schemas.microsoft.com/office/powerpoint/2010/main" val="3410765061"/>
-      </p:ext>
-    </p:extLst>
-  </p:cSld>
-  <p:clrMapOvr>
-    <a:masterClrMapping/>
-  </p:clrMapOvr>
 </p:sld>
 </file>
 
